--- a/FormForge_Presentation.pptx
+++ b/FormForge_Presentation.pptx
@@ -5,20 +5,20 @@
     <p:sldMasterId id="2147483648" r:id="rId1"/>
   </p:sldMasterIdLst>
   <p:sldIdLst>
-    <p:sldId id="256" r:id="rId7"/>
-    <p:sldId id="257" r:id="rId8"/>
-    <p:sldId id="258" r:id="rId9"/>
-    <p:sldId id="259" r:id="rId10"/>
-    <p:sldId id="260" r:id="rId11"/>
-    <p:sldId id="261" r:id="rId12"/>
-    <p:sldId id="262" r:id="rId13"/>
-    <p:sldId id="263" r:id="rId14"/>
-    <p:sldId id="264" r:id="rId15"/>
-    <p:sldId id="265" r:id="rId16"/>
-    <p:sldId id="266" r:id="rId17"/>
-    <p:sldId id="267" r:id="rId18"/>
+    <p:sldId id="256" r:id="rId2"/>
+    <p:sldId id="257" r:id="rId3"/>
+    <p:sldId id="258" r:id="rId4"/>
+    <p:sldId id="259" r:id="rId5"/>
+    <p:sldId id="260" r:id="rId6"/>
+    <p:sldId id="261" r:id="rId7"/>
+    <p:sldId id="262" r:id="rId8"/>
+    <p:sldId id="263" r:id="rId9"/>
+    <p:sldId id="264" r:id="rId10"/>
+    <p:sldId id="265" r:id="rId11"/>
+    <p:sldId id="266" r:id="rId12"/>
+    <p:sldId id="267" r:id="rId13"/>
   </p:sldIdLst>
-  <p:sldSz cx="12191695" cy="6858000" type="screen4x3"/>
+  <p:sldSz cx="12192000" cy="6858000"/>
   <p:notesSz cx="6858000" cy="9144000"/>
   <p:defaultTextStyle>
     <a:defPPr>
@@ -115,6 +115,22 @@
       </a:defRPr>
     </a:lvl9pPr>
   </p:defaultTextStyle>
+  <p:extLst>
+    <p:ext uri="{EFAFB233-063F-42B5-8137-9DF3F51BA10A}">
+      <p15:sldGuideLst xmlns:p15="http://schemas.microsoft.com/office/powerpoint/2012/main">
+        <p15:guide id="1" orient="horz" pos="2160">
+          <p15:clr>
+            <a:srgbClr val="A4A3A4"/>
+          </p15:clr>
+        </p15:guide>
+        <p15:guide id="2" pos="2880">
+          <p15:clr>
+            <a:srgbClr val="A4A3A4"/>
+          </p15:clr>
+        </p15:guide>
+      </p15:sldGuideLst>
+    </p:ext>
+  </p:extLst>
 </p:presentation>
 </file>
 
@@ -156,10 +172,9 @@
           <a:lstStyle/>
           <a:p>
             <a:r>
-              <a:rPr lang="en-US" smtClean="0"/>
+              <a:rPr lang="en-US"/>
               <a:t>Click to edit Master title style</a:t>
             </a:r>
-            <a:endParaRPr lang="en-US"/>
           </a:p>
         </p:txBody>
       </p:sp>
@@ -275,10 +290,9 @@
           </a:lstStyle>
           <a:p>
             <a:r>
-              <a:rPr lang="en-US" smtClean="0"/>
+              <a:rPr lang="en-US"/>
               <a:t>Click to edit Master subtitle style</a:t>
             </a:r>
-            <a:endParaRPr lang="en-US"/>
           </a:p>
         </p:txBody>
       </p:sp>
@@ -299,7 +313,7 @@
           <a:p>
             <a:fld id="{5BCAD085-E8A6-8845-BD4E-CB4CCA059FC4}" type="datetimeFigureOut">
               <a:rPr lang="en-US" smtClean="0"/>
-              <a:t>1/27/13</a:t>
+              <a:t>7/27/2026</a:t>
             </a:fld>
             <a:endParaRPr lang="en-US"/>
           </a:p>
@@ -393,10 +407,9 @@
           <a:lstStyle/>
           <a:p>
             <a:r>
-              <a:rPr lang="en-US" smtClean="0"/>
+              <a:rPr lang="en-US"/>
               <a:t>Click to edit Master title style</a:t>
             </a:r>
-            <a:endParaRPr lang="en-US"/>
           </a:p>
         </p:txBody>
       </p:sp>
@@ -417,38 +430,37 @@
           <a:p>
             <a:pPr lvl="0"/>
             <a:r>
-              <a:rPr lang="en-US" smtClean="0"/>
+              <a:rPr lang="en-US"/>
               <a:t>Click to edit Master text styles</a:t>
             </a:r>
           </a:p>
           <a:p>
             <a:pPr lvl="1"/>
             <a:r>
-              <a:rPr lang="en-US" smtClean="0"/>
+              <a:rPr lang="en-US"/>
               <a:t>Second level</a:t>
             </a:r>
           </a:p>
           <a:p>
             <a:pPr lvl="2"/>
             <a:r>
-              <a:rPr lang="en-US" smtClean="0"/>
+              <a:rPr lang="en-US"/>
               <a:t>Third level</a:t>
             </a:r>
           </a:p>
           <a:p>
             <a:pPr lvl="3"/>
             <a:r>
-              <a:rPr lang="en-US" smtClean="0"/>
+              <a:rPr lang="en-US"/>
               <a:t>Fourth level</a:t>
             </a:r>
           </a:p>
           <a:p>
             <a:pPr lvl="4"/>
             <a:r>
-              <a:rPr lang="en-US" smtClean="0"/>
+              <a:rPr lang="en-US"/>
               <a:t>Fifth level</a:t>
             </a:r>
-            <a:endParaRPr lang="en-US"/>
           </a:p>
         </p:txBody>
       </p:sp>
@@ -469,7 +481,7 @@
           <a:p>
             <a:fld id="{5BCAD085-E8A6-8845-BD4E-CB4CCA059FC4}" type="datetimeFigureOut">
               <a:rPr lang="en-US" smtClean="0"/>
-              <a:t>1/27/13</a:t>
+              <a:t>7/27/2026</a:t>
             </a:fld>
             <a:endParaRPr lang="en-US"/>
           </a:p>
@@ -568,10 +580,9 @@
           <a:lstStyle/>
           <a:p>
             <a:r>
-              <a:rPr lang="en-US" smtClean="0"/>
+              <a:rPr lang="en-US"/>
               <a:t>Click to edit Master title style</a:t>
             </a:r>
-            <a:endParaRPr lang="en-US"/>
           </a:p>
         </p:txBody>
       </p:sp>
@@ -597,38 +608,37 @@
           <a:p>
             <a:pPr lvl="0"/>
             <a:r>
-              <a:rPr lang="en-US" smtClean="0"/>
+              <a:rPr lang="en-US"/>
               <a:t>Click to edit Master text styles</a:t>
             </a:r>
           </a:p>
           <a:p>
             <a:pPr lvl="1"/>
             <a:r>
-              <a:rPr lang="en-US" smtClean="0"/>
+              <a:rPr lang="en-US"/>
               <a:t>Second level</a:t>
             </a:r>
           </a:p>
           <a:p>
             <a:pPr lvl="2"/>
             <a:r>
-              <a:rPr lang="en-US" smtClean="0"/>
+              <a:rPr lang="en-US"/>
               <a:t>Third level</a:t>
             </a:r>
           </a:p>
           <a:p>
             <a:pPr lvl="3"/>
             <a:r>
-              <a:rPr lang="en-US" smtClean="0"/>
+              <a:rPr lang="en-US"/>
               <a:t>Fourth level</a:t>
             </a:r>
           </a:p>
           <a:p>
             <a:pPr lvl="4"/>
             <a:r>
-              <a:rPr lang="en-US" smtClean="0"/>
+              <a:rPr lang="en-US"/>
               <a:t>Fifth level</a:t>
             </a:r>
-            <a:endParaRPr lang="en-US"/>
           </a:p>
         </p:txBody>
       </p:sp>
@@ -649,7 +659,7 @@
           <a:p>
             <a:fld id="{5BCAD085-E8A6-8845-BD4E-CB4CCA059FC4}" type="datetimeFigureOut">
               <a:rPr lang="en-US" smtClean="0"/>
-              <a:t>1/27/13</a:t>
+              <a:t>7/27/2026</a:t>
             </a:fld>
             <a:endParaRPr lang="en-US"/>
           </a:p>
@@ -743,10 +753,9 @@
           <a:lstStyle/>
           <a:p>
             <a:r>
-              <a:rPr lang="en-US" smtClean="0"/>
+              <a:rPr lang="en-US"/>
               <a:t>Click to edit Master title style</a:t>
             </a:r>
-            <a:endParaRPr lang="en-US"/>
           </a:p>
         </p:txBody>
       </p:sp>
@@ -767,38 +776,37 @@
           <a:p>
             <a:pPr lvl="0"/>
             <a:r>
-              <a:rPr lang="en-US" smtClean="0"/>
+              <a:rPr lang="en-US"/>
               <a:t>Click to edit Master text styles</a:t>
             </a:r>
           </a:p>
           <a:p>
             <a:pPr lvl="1"/>
             <a:r>
-              <a:rPr lang="en-US" smtClean="0"/>
+              <a:rPr lang="en-US"/>
               <a:t>Second level</a:t>
             </a:r>
           </a:p>
           <a:p>
             <a:pPr lvl="2"/>
             <a:r>
-              <a:rPr lang="en-US" smtClean="0"/>
+              <a:rPr lang="en-US"/>
               <a:t>Third level</a:t>
             </a:r>
           </a:p>
           <a:p>
             <a:pPr lvl="3"/>
             <a:r>
-              <a:rPr lang="en-US" smtClean="0"/>
+              <a:rPr lang="en-US"/>
               <a:t>Fourth level</a:t>
             </a:r>
           </a:p>
           <a:p>
             <a:pPr lvl="4"/>
             <a:r>
-              <a:rPr lang="en-US" smtClean="0"/>
+              <a:rPr lang="en-US"/>
               <a:t>Fifth level</a:t>
             </a:r>
-            <a:endParaRPr lang="en-US"/>
           </a:p>
         </p:txBody>
       </p:sp>
@@ -819,7 +827,7 @@
           <a:p>
             <a:fld id="{5BCAD085-E8A6-8845-BD4E-CB4CCA059FC4}" type="datetimeFigureOut">
               <a:rPr lang="en-US" smtClean="0"/>
-              <a:t>1/27/13</a:t>
+              <a:t>7/27/2026</a:t>
             </a:fld>
             <a:endParaRPr lang="en-US"/>
           </a:p>
@@ -922,10 +930,9 @@
           </a:lstStyle>
           <a:p>
             <a:r>
-              <a:rPr lang="en-US" smtClean="0"/>
+              <a:rPr lang="en-US"/>
               <a:t>Click to edit Master title style</a:t>
             </a:r>
-            <a:endParaRPr lang="en-US"/>
           </a:p>
         </p:txBody>
       </p:sp>
@@ -1042,7 +1049,7 @@
           <a:p>
             <a:pPr lvl="0"/>
             <a:r>
-              <a:rPr lang="en-US" smtClean="0"/>
+              <a:rPr lang="en-US"/>
               <a:t>Click to edit Master text styles</a:t>
             </a:r>
           </a:p>
@@ -1065,7 +1072,7 @@
           <a:p>
             <a:fld id="{5BCAD085-E8A6-8845-BD4E-CB4CCA059FC4}" type="datetimeFigureOut">
               <a:rPr lang="en-US" smtClean="0"/>
-              <a:t>1/27/13</a:t>
+              <a:t>7/27/2026</a:t>
             </a:fld>
             <a:endParaRPr lang="en-US"/>
           </a:p>
@@ -1159,10 +1166,9 @@
           <a:lstStyle/>
           <a:p>
             <a:r>
-              <a:rPr lang="en-US" smtClean="0"/>
+              <a:rPr lang="en-US"/>
               <a:t>Click to edit Master title style</a:t>
             </a:r>
-            <a:endParaRPr lang="en-US"/>
           </a:p>
         </p:txBody>
       </p:sp>
@@ -1216,38 +1222,37 @@
           <a:p>
             <a:pPr lvl="0"/>
             <a:r>
-              <a:rPr lang="en-US" smtClean="0"/>
+              <a:rPr lang="en-US"/>
               <a:t>Click to edit Master text styles</a:t>
             </a:r>
           </a:p>
           <a:p>
             <a:pPr lvl="1"/>
             <a:r>
-              <a:rPr lang="en-US" smtClean="0"/>
+              <a:rPr lang="en-US"/>
               <a:t>Second level</a:t>
             </a:r>
           </a:p>
           <a:p>
             <a:pPr lvl="2"/>
             <a:r>
-              <a:rPr lang="en-US" smtClean="0"/>
+              <a:rPr lang="en-US"/>
               <a:t>Third level</a:t>
             </a:r>
           </a:p>
           <a:p>
             <a:pPr lvl="3"/>
             <a:r>
-              <a:rPr lang="en-US" smtClean="0"/>
+              <a:rPr lang="en-US"/>
               <a:t>Fourth level</a:t>
             </a:r>
           </a:p>
           <a:p>
             <a:pPr lvl="4"/>
             <a:r>
-              <a:rPr lang="en-US" smtClean="0"/>
+              <a:rPr lang="en-US"/>
               <a:t>Fifth level</a:t>
             </a:r>
-            <a:endParaRPr lang="en-US"/>
           </a:p>
         </p:txBody>
       </p:sp>
@@ -1301,38 +1306,37 @@
           <a:p>
             <a:pPr lvl="0"/>
             <a:r>
-              <a:rPr lang="en-US" smtClean="0"/>
+              <a:rPr lang="en-US"/>
               <a:t>Click to edit Master text styles</a:t>
             </a:r>
           </a:p>
           <a:p>
             <a:pPr lvl="1"/>
             <a:r>
-              <a:rPr lang="en-US" smtClean="0"/>
+              <a:rPr lang="en-US"/>
               <a:t>Second level</a:t>
             </a:r>
           </a:p>
           <a:p>
             <a:pPr lvl="2"/>
             <a:r>
-              <a:rPr lang="en-US" smtClean="0"/>
+              <a:rPr lang="en-US"/>
               <a:t>Third level</a:t>
             </a:r>
           </a:p>
           <a:p>
             <a:pPr lvl="3"/>
             <a:r>
-              <a:rPr lang="en-US" smtClean="0"/>
+              <a:rPr lang="en-US"/>
               <a:t>Fourth level</a:t>
             </a:r>
           </a:p>
           <a:p>
             <a:pPr lvl="4"/>
             <a:r>
-              <a:rPr lang="en-US" smtClean="0"/>
+              <a:rPr lang="en-US"/>
               <a:t>Fifth level</a:t>
             </a:r>
-            <a:endParaRPr lang="en-US"/>
           </a:p>
         </p:txBody>
       </p:sp>
@@ -1353,7 +1357,7 @@
           <a:p>
             <a:fld id="{5BCAD085-E8A6-8845-BD4E-CB4CCA059FC4}" type="datetimeFigureOut">
               <a:rPr lang="en-US" smtClean="0"/>
-              <a:t>1/27/13</a:t>
+              <a:t>7/27/2026</a:t>
             </a:fld>
             <a:endParaRPr lang="en-US"/>
           </a:p>
@@ -1451,10 +1455,9 @@
           </a:lstStyle>
           <a:p>
             <a:r>
-              <a:rPr lang="en-US" smtClean="0"/>
+              <a:rPr lang="en-US"/>
               <a:t>Click to edit Master title style</a:t>
             </a:r>
-            <a:endParaRPr lang="en-US"/>
           </a:p>
         </p:txBody>
       </p:sp>
@@ -1517,7 +1520,7 @@
           <a:p>
             <a:pPr lvl="0"/>
             <a:r>
-              <a:rPr lang="en-US" smtClean="0"/>
+              <a:rPr lang="en-US"/>
               <a:t>Click to edit Master text styles</a:t>
             </a:r>
           </a:p>
@@ -1573,38 +1576,37 @@
           <a:p>
             <a:pPr lvl="0"/>
             <a:r>
-              <a:rPr lang="en-US" smtClean="0"/>
+              <a:rPr lang="en-US"/>
               <a:t>Click to edit Master text styles</a:t>
             </a:r>
           </a:p>
           <a:p>
             <a:pPr lvl="1"/>
             <a:r>
-              <a:rPr lang="en-US" smtClean="0"/>
+              <a:rPr lang="en-US"/>
               <a:t>Second level</a:t>
             </a:r>
           </a:p>
           <a:p>
             <a:pPr lvl="2"/>
             <a:r>
-              <a:rPr lang="en-US" smtClean="0"/>
+              <a:rPr lang="en-US"/>
               <a:t>Third level</a:t>
             </a:r>
           </a:p>
           <a:p>
             <a:pPr lvl="3"/>
             <a:r>
-              <a:rPr lang="en-US" smtClean="0"/>
+              <a:rPr lang="en-US"/>
               <a:t>Fourth level</a:t>
             </a:r>
           </a:p>
           <a:p>
             <a:pPr lvl="4"/>
             <a:r>
-              <a:rPr lang="en-US" smtClean="0"/>
+              <a:rPr lang="en-US"/>
               <a:t>Fifth level</a:t>
             </a:r>
-            <a:endParaRPr lang="en-US"/>
           </a:p>
         </p:txBody>
       </p:sp>
@@ -1667,7 +1669,7 @@
           <a:p>
             <a:pPr lvl="0"/>
             <a:r>
-              <a:rPr lang="en-US" smtClean="0"/>
+              <a:rPr lang="en-US"/>
               <a:t>Click to edit Master text styles</a:t>
             </a:r>
           </a:p>
@@ -1723,38 +1725,37 @@
           <a:p>
             <a:pPr lvl="0"/>
             <a:r>
-              <a:rPr lang="en-US" smtClean="0"/>
+              <a:rPr lang="en-US"/>
               <a:t>Click to edit Master text styles</a:t>
             </a:r>
           </a:p>
           <a:p>
             <a:pPr lvl="1"/>
             <a:r>
-              <a:rPr lang="en-US" smtClean="0"/>
+              <a:rPr lang="en-US"/>
               <a:t>Second level</a:t>
             </a:r>
           </a:p>
           <a:p>
             <a:pPr lvl="2"/>
             <a:r>
-              <a:rPr lang="en-US" smtClean="0"/>
+              <a:rPr lang="en-US"/>
               <a:t>Third level</a:t>
             </a:r>
           </a:p>
           <a:p>
             <a:pPr lvl="3"/>
             <a:r>
-              <a:rPr lang="en-US" smtClean="0"/>
+              <a:rPr lang="en-US"/>
               <a:t>Fourth level</a:t>
             </a:r>
           </a:p>
           <a:p>
             <a:pPr lvl="4"/>
             <a:r>
-              <a:rPr lang="en-US" smtClean="0"/>
+              <a:rPr lang="en-US"/>
               <a:t>Fifth level</a:t>
             </a:r>
-            <a:endParaRPr lang="en-US"/>
           </a:p>
         </p:txBody>
       </p:sp>
@@ -1775,7 +1776,7 @@
           <a:p>
             <a:fld id="{5BCAD085-E8A6-8845-BD4E-CB4CCA059FC4}" type="datetimeFigureOut">
               <a:rPr lang="en-US" smtClean="0"/>
-              <a:t>1/27/13</a:t>
+              <a:t>7/27/2026</a:t>
             </a:fld>
             <a:endParaRPr lang="en-US"/>
           </a:p>
@@ -1869,10 +1870,9 @@
           <a:lstStyle/>
           <a:p>
             <a:r>
-              <a:rPr lang="en-US" smtClean="0"/>
+              <a:rPr lang="en-US"/>
               <a:t>Click to edit Master title style</a:t>
             </a:r>
-            <a:endParaRPr lang="en-US"/>
           </a:p>
         </p:txBody>
       </p:sp>
@@ -1893,7 +1893,7 @@
           <a:p>
             <a:fld id="{5BCAD085-E8A6-8845-BD4E-CB4CCA059FC4}" type="datetimeFigureOut">
               <a:rPr lang="en-US" smtClean="0"/>
-              <a:t>1/27/13</a:t>
+              <a:t>7/27/2026</a:t>
             </a:fld>
             <a:endParaRPr lang="en-US"/>
           </a:p>
@@ -1988,7 +1988,7 @@
           <a:p>
             <a:fld id="{5BCAD085-E8A6-8845-BD4E-CB4CCA059FC4}" type="datetimeFigureOut">
               <a:rPr lang="en-US" smtClean="0"/>
-              <a:t>1/27/13</a:t>
+              <a:t>7/27/2026</a:t>
             </a:fld>
             <a:endParaRPr lang="en-US"/>
           </a:p>
@@ -2091,10 +2091,9 @@
           </a:lstStyle>
           <a:p>
             <a:r>
-              <a:rPr lang="en-US" smtClean="0"/>
+              <a:rPr lang="en-US"/>
               <a:t>Click to edit Master title style</a:t>
             </a:r>
-            <a:endParaRPr lang="en-US"/>
           </a:p>
         </p:txBody>
       </p:sp>
@@ -2148,38 +2147,37 @@
           <a:p>
             <a:pPr lvl="0"/>
             <a:r>
-              <a:rPr lang="en-US" smtClean="0"/>
+              <a:rPr lang="en-US"/>
               <a:t>Click to edit Master text styles</a:t>
             </a:r>
           </a:p>
           <a:p>
             <a:pPr lvl="1"/>
             <a:r>
-              <a:rPr lang="en-US" smtClean="0"/>
+              <a:rPr lang="en-US"/>
               <a:t>Second level</a:t>
             </a:r>
           </a:p>
           <a:p>
             <a:pPr lvl="2"/>
             <a:r>
-              <a:rPr lang="en-US" smtClean="0"/>
+              <a:rPr lang="en-US"/>
               <a:t>Third level</a:t>
             </a:r>
           </a:p>
           <a:p>
             <a:pPr lvl="3"/>
             <a:r>
-              <a:rPr lang="en-US" smtClean="0"/>
+              <a:rPr lang="en-US"/>
               <a:t>Fourth level</a:t>
             </a:r>
           </a:p>
           <a:p>
             <a:pPr lvl="4"/>
             <a:r>
-              <a:rPr lang="en-US" smtClean="0"/>
+              <a:rPr lang="en-US"/>
               <a:t>Fifth level</a:t>
             </a:r>
-            <a:endParaRPr lang="en-US"/>
           </a:p>
         </p:txBody>
       </p:sp>
@@ -2242,7 +2240,7 @@
           <a:p>
             <a:pPr lvl="0"/>
             <a:r>
-              <a:rPr lang="en-US" smtClean="0"/>
+              <a:rPr lang="en-US"/>
               <a:t>Click to edit Master text styles</a:t>
             </a:r>
           </a:p>
@@ -2265,7 +2263,7 @@
           <a:p>
             <a:fld id="{5BCAD085-E8A6-8845-BD4E-CB4CCA059FC4}" type="datetimeFigureOut">
               <a:rPr lang="en-US" smtClean="0"/>
-              <a:t>1/27/13</a:t>
+              <a:t>7/27/2026</a:t>
             </a:fld>
             <a:endParaRPr lang="en-US"/>
           </a:p>
@@ -2368,10 +2366,9 @@
           </a:lstStyle>
           <a:p>
             <a:r>
-              <a:rPr lang="en-US" smtClean="0"/>
+              <a:rPr lang="en-US"/>
               <a:t>Click to edit Master title style</a:t>
             </a:r>
-            <a:endParaRPr lang="en-US"/>
           </a:p>
         </p:txBody>
       </p:sp>
@@ -2495,7 +2492,7 @@
           <a:p>
             <a:pPr lvl="0"/>
             <a:r>
-              <a:rPr lang="en-US" smtClean="0"/>
+              <a:rPr lang="en-US"/>
               <a:t>Click to edit Master text styles</a:t>
             </a:r>
           </a:p>
@@ -2518,7 +2515,7 @@
           <a:p>
             <a:fld id="{5BCAD085-E8A6-8845-BD4E-CB4CCA059FC4}" type="datetimeFigureOut">
               <a:rPr lang="en-US" smtClean="0"/>
-              <a:t>1/27/13</a:t>
+              <a:t>7/27/2026</a:t>
             </a:fld>
             <a:endParaRPr lang="en-US"/>
           </a:p>
@@ -2627,10 +2624,9 @@
           <a:lstStyle/>
           <a:p>
             <a:r>
-              <a:rPr lang="en-US" smtClean="0"/>
+              <a:rPr lang="en-US"/>
               <a:t>Click to edit Master title style</a:t>
             </a:r>
-            <a:endParaRPr lang="en-US"/>
           </a:p>
         </p:txBody>
       </p:sp>
@@ -2661,38 +2657,37 @@
           <a:p>
             <a:pPr lvl="0"/>
             <a:r>
-              <a:rPr lang="en-US" smtClean="0"/>
+              <a:rPr lang="en-US"/>
               <a:t>Click to edit Master text styles</a:t>
             </a:r>
           </a:p>
           <a:p>
             <a:pPr lvl="1"/>
             <a:r>
-              <a:rPr lang="en-US" smtClean="0"/>
+              <a:rPr lang="en-US"/>
               <a:t>Second level</a:t>
             </a:r>
           </a:p>
           <a:p>
             <a:pPr lvl="2"/>
             <a:r>
-              <a:rPr lang="en-US" smtClean="0"/>
+              <a:rPr lang="en-US"/>
               <a:t>Third level</a:t>
             </a:r>
           </a:p>
           <a:p>
             <a:pPr lvl="3"/>
             <a:r>
-              <a:rPr lang="en-US" smtClean="0"/>
+              <a:rPr lang="en-US"/>
               <a:t>Fourth level</a:t>
             </a:r>
           </a:p>
           <a:p>
             <a:pPr lvl="4"/>
             <a:r>
-              <a:rPr lang="en-US" smtClean="0"/>
+              <a:rPr lang="en-US"/>
               <a:t>Fifth level</a:t>
             </a:r>
-            <a:endParaRPr lang="en-US"/>
           </a:p>
         </p:txBody>
       </p:sp>
@@ -2731,7 +2726,7 @@
           <a:p>
             <a:fld id="{5BCAD085-E8A6-8845-BD4E-CB4CCA059FC4}" type="datetimeFigureOut">
               <a:rPr lang="en-US" smtClean="0"/>
-              <a:t>1/27/13</a:t>
+              <a:t>7/27/2026</a:t>
             </a:fld>
             <a:endParaRPr lang="en-US"/>
           </a:p>
@@ -3090,7 +3085,7 @@
 </file>
 
 <file path=ppt/slides/slide1.xml><?xml version="1.0" encoding="utf-8"?>
-<p:sld xmlns:a="http://schemas.openxmlformats.org/drawingml/2006/main" xmlns:p="http://schemas.openxmlformats.org/presentationml/2006/main" xmlns:r="http://schemas.openxmlformats.org/officeDocument/2006/relationships">
+<p:sld xmlns:a="http://schemas.openxmlformats.org/drawingml/2006/main" xmlns:r="http://schemas.openxmlformats.org/officeDocument/2006/relationships" xmlns:p="http://schemas.openxmlformats.org/presentationml/2006/main">
   <p:cSld>
     <p:spTree>
       <p:nvGrpSpPr>
@@ -3098,7 +3093,14 @@
         <p:cNvGrpSpPr/>
         <p:nvPr/>
       </p:nvGrpSpPr>
-      <p:grpSpPr/>
+      <p:grpSpPr>
+        <a:xfrm>
+          <a:off x="0" y="0"/>
+          <a:ext cx="0" cy="0"/>
+          <a:chOff x="0" y="0"/>
+          <a:chExt cx="0" cy="0"/>
+        </a:xfrm>
+      </p:grpSpPr>
       <p:sp>
         <p:nvSpPr>
           <p:cNvPr id="2" name="Rectangle 1"/>
@@ -3140,6 +3142,7 @@
           <a:lstStyle/>
           <a:p>
             <a:pPr algn="ctr"/>
+            <a:endParaRPr/>
           </a:p>
         </p:txBody>
       </p:sp>
@@ -3184,6 +3187,7 @@
           <a:lstStyle/>
           <a:p>
             <a:pPr algn="ctr"/>
+            <a:endParaRPr/>
           </a:p>
         </p:txBody>
       </p:sp>
@@ -3196,7 +3200,7 @@
         <p:spPr>
           <a:xfrm>
             <a:off x="640080" y="1463040"/>
-            <a:ext cx="10972800" cy="1097280"/>
+            <a:ext cx="10972800" cy="984885"/>
           </a:xfrm>
           <a:prstGeom prst="rect">
             <a:avLst/>
@@ -3204,14 +3208,14 @@
           <a:noFill/>
         </p:spPr>
         <p:txBody>
-          <a:bodyPr wrap="square" anchor="t" lIns="0" rIns="0" tIns="0" bIns="0">
+          <a:bodyPr wrap="square" lIns="0" tIns="0" rIns="0" bIns="0" anchor="t">
             <a:spAutoFit/>
           </a:bodyPr>
           <a:lstStyle/>
           <a:p>
             <a:pPr algn="l"/>
             <a:r>
-              <a:rPr sz="6400" b="1">
+              <a:rPr sz="6400" b="1" dirty="0" err="1">
                 <a:solidFill>
                   <a:srgbClr val="FFFFFF"/>
                 </a:solidFill>
@@ -3219,6 +3223,21 @@
               </a:rPr>
               <a:t>FormForge</a:t>
             </a:r>
+            <a:r>
+              <a:rPr lang="en-IN" sz="6400" b="1" dirty="0">
+                <a:solidFill>
+                  <a:srgbClr val="FFFFFF"/>
+                </a:solidFill>
+                <a:latin typeface="Calibri"/>
+              </a:rPr>
+              <a:t>- Site Management</a:t>
+            </a:r>
+            <a:endParaRPr sz="6400" b="1" dirty="0">
+              <a:solidFill>
+                <a:srgbClr val="FFFFFF"/>
+              </a:solidFill>
+              <a:latin typeface="Calibri"/>
+            </a:endParaRPr>
           </a:p>
         </p:txBody>
       </p:sp>
@@ -3239,7 +3258,7 @@
           <a:noFill/>
         </p:spPr>
         <p:txBody>
-          <a:bodyPr wrap="square" anchor="t" lIns="0" rIns="0" tIns="0" bIns="0">
+          <a:bodyPr wrap="square" lIns="0" tIns="0" rIns="0" bIns="0" anchor="t">
             <a:spAutoFit/>
           </a:bodyPr>
           <a:lstStyle/>
@@ -3274,7 +3293,7 @@
           <a:noFill/>
         </p:spPr>
         <p:txBody>
-          <a:bodyPr wrap="square" anchor="t" lIns="0" rIns="0" tIns="0" bIns="0">
+          <a:bodyPr wrap="square" lIns="0" tIns="0" rIns="0" bIns="0" anchor="t">
             <a:spAutoFit/>
           </a:bodyPr>
           <a:lstStyle/>
@@ -3309,7 +3328,7 @@
           <a:noFill/>
         </p:spPr>
         <p:txBody>
-          <a:bodyPr wrap="square" anchor="t" lIns="0" rIns="0" tIns="0" bIns="0">
+          <a:bodyPr wrap="square" lIns="0" tIns="0" rIns="0" bIns="0" anchor="t">
             <a:spAutoFit/>
           </a:bodyPr>
           <a:lstStyle/>
@@ -3344,7 +3363,7 @@
           <a:noFill/>
         </p:spPr>
         <p:txBody>
-          <a:bodyPr wrap="square" anchor="t" lIns="0" rIns="0" tIns="0" bIns="0">
+          <a:bodyPr wrap="square" lIns="0" tIns="0" rIns="0" bIns="0" anchor="t">
             <a:spAutoFit/>
           </a:bodyPr>
           <a:lstStyle/>
@@ -3379,7 +3398,7 @@
           <a:noFill/>
         </p:spPr>
         <p:txBody>
-          <a:bodyPr wrap="square" anchor="t" lIns="0" rIns="0" tIns="0" bIns="0">
+          <a:bodyPr wrap="square" lIns="0" tIns="0" rIns="0" bIns="0" anchor="t">
             <a:spAutoFit/>
           </a:bodyPr>
           <a:lstStyle/>
@@ -3406,7 +3425,7 @@
 </file>
 
 <file path=ppt/slides/slide10.xml><?xml version="1.0" encoding="utf-8"?>
-<p:sld xmlns:a="http://schemas.openxmlformats.org/drawingml/2006/main" xmlns:p="http://schemas.openxmlformats.org/presentationml/2006/main" xmlns:r="http://schemas.openxmlformats.org/officeDocument/2006/relationships">
+<p:sld xmlns:a="http://schemas.openxmlformats.org/drawingml/2006/main" xmlns:r="http://schemas.openxmlformats.org/officeDocument/2006/relationships" xmlns:p="http://schemas.openxmlformats.org/presentationml/2006/main">
   <p:cSld>
     <p:spTree>
       <p:nvGrpSpPr>
@@ -3414,7 +3433,14 @@
         <p:cNvGrpSpPr/>
         <p:nvPr/>
       </p:nvGrpSpPr>
-      <p:grpSpPr/>
+      <p:grpSpPr>
+        <a:xfrm>
+          <a:off x="0" y="0"/>
+          <a:ext cx="0" cy="0"/>
+          <a:chOff x="0" y="0"/>
+          <a:chExt cx="0" cy="0"/>
+        </a:xfrm>
+      </p:grpSpPr>
       <p:sp>
         <p:nvSpPr>
           <p:cNvPr id="2" name="Rectangle 1"/>
@@ -3456,6 +3482,7 @@
           <a:lstStyle/>
           <a:p>
             <a:pPr algn="ctr"/>
+            <a:endParaRPr/>
           </a:p>
         </p:txBody>
       </p:sp>
@@ -3476,7 +3503,7 @@
           <a:noFill/>
         </p:spPr>
         <p:txBody>
-          <a:bodyPr wrap="square" anchor="t" lIns="0" rIns="0" tIns="0" bIns="0">
+          <a:bodyPr wrap="square" lIns="0" tIns="0" rIns="0" bIns="0" anchor="t">
             <a:spAutoFit/>
           </a:bodyPr>
           <a:lstStyle/>
@@ -3511,7 +3538,7 @@
           <a:noFill/>
         </p:spPr>
         <p:txBody>
-          <a:bodyPr wrap="square" anchor="t" lIns="0" rIns="0" tIns="0" bIns="0">
+          <a:bodyPr wrap="square" lIns="0" tIns="0" rIns="0" bIns="0" anchor="t">
             <a:spAutoFit/>
           </a:bodyPr>
           <a:lstStyle/>
@@ -3570,6 +3597,7 @@
           <a:lstStyle/>
           <a:p>
             <a:pPr algn="ctr"/>
+            <a:endParaRPr/>
           </a:p>
         </p:txBody>
       </p:sp>
@@ -3614,6 +3642,7 @@
           <a:lstStyle/>
           <a:p>
             <a:pPr algn="ctr"/>
+            <a:endParaRPr/>
           </a:p>
         </p:txBody>
       </p:sp>
@@ -3634,7 +3663,7 @@
           <a:noFill/>
         </p:spPr>
         <p:txBody>
-          <a:bodyPr wrap="square" anchor="t" lIns="0" rIns="0" tIns="0" bIns="0">
+          <a:bodyPr wrap="square" lIns="0" tIns="0" rIns="0" bIns="0" anchor="t">
             <a:spAutoFit/>
           </a:bodyPr>
           <a:lstStyle/>
@@ -3841,6 +3870,7 @@
           <a:lstStyle/>
           <a:p>
             <a:pPr algn="ctr"/>
+            <a:endParaRPr/>
           </a:p>
         </p:txBody>
       </p:sp>
@@ -3861,7 +3891,7 @@
           <a:noFill/>
         </p:spPr>
         <p:txBody>
-          <a:bodyPr wrap="square" anchor="t" lIns="0" rIns="0" tIns="0" bIns="0">
+          <a:bodyPr wrap="square" lIns="0" tIns="0" rIns="0" bIns="0" anchor="t">
             <a:spAutoFit/>
           </a:bodyPr>
           <a:lstStyle/>
@@ -4068,6 +4098,7 @@
           <a:lstStyle/>
           <a:p>
             <a:pPr algn="ctr"/>
+            <a:endParaRPr/>
           </a:p>
         </p:txBody>
       </p:sp>
@@ -4088,7 +4119,7 @@
           <a:noFill/>
         </p:spPr>
         <p:txBody>
-          <a:bodyPr wrap="square" anchor="t" lIns="0" rIns="0" tIns="0" bIns="0">
+          <a:bodyPr wrap="square" lIns="0" tIns="0" rIns="0" bIns="0" anchor="t">
             <a:spAutoFit/>
           </a:bodyPr>
           <a:lstStyle/>
@@ -4270,6 +4301,7 @@
           <a:lstStyle/>
           <a:p>
             <a:pPr algn="ctr"/>
+            <a:endParaRPr/>
           </a:p>
         </p:txBody>
       </p:sp>
@@ -4290,7 +4322,7 @@
           <a:noFill/>
         </p:spPr>
         <p:txBody>
-          <a:bodyPr wrap="square" anchor="t" lIns="0" rIns="0" tIns="0" bIns="0">
+          <a:bodyPr wrap="square" lIns="0" tIns="0" rIns="0" bIns="0" anchor="t">
             <a:spAutoFit/>
           </a:bodyPr>
           <a:lstStyle/>
@@ -4472,6 +4504,7 @@
           <a:lstStyle/>
           <a:p>
             <a:pPr algn="ctr"/>
+            <a:endParaRPr/>
           </a:p>
         </p:txBody>
       </p:sp>
@@ -4492,7 +4525,7 @@
           <a:noFill/>
         </p:spPr>
         <p:txBody>
-          <a:bodyPr wrap="square" anchor="t" lIns="0" rIns="0" tIns="0" bIns="0">
+          <a:bodyPr wrap="square" lIns="0" tIns="0" rIns="0" bIns="0" anchor="t">
             <a:spAutoFit/>
           </a:bodyPr>
           <a:lstStyle/>
@@ -4674,6 +4707,7 @@
           <a:lstStyle/>
           <a:p>
             <a:pPr algn="ctr"/>
+            <a:endParaRPr/>
           </a:p>
         </p:txBody>
       </p:sp>
@@ -4694,7 +4728,7 @@
           <a:noFill/>
         </p:spPr>
         <p:txBody>
-          <a:bodyPr wrap="square" anchor="t" lIns="0" rIns="0" tIns="0" bIns="0">
+          <a:bodyPr wrap="square" lIns="0" tIns="0" rIns="0" bIns="0" anchor="t">
             <a:spAutoFit/>
           </a:bodyPr>
           <a:lstStyle/>
@@ -4877,7 +4911,7 @@
           <a:noFill/>
         </p:spPr>
         <p:txBody>
-          <a:bodyPr wrap="square" anchor="t" lIns="0" rIns="0" tIns="0" bIns="0">
+          <a:bodyPr wrap="square" lIns="0" tIns="0" rIns="0" bIns="0" anchor="t">
             <a:spAutoFit/>
           </a:bodyPr>
           <a:lstStyle/>
@@ -4912,7 +4946,7 @@
           <a:noFill/>
         </p:spPr>
         <p:txBody>
-          <a:bodyPr wrap="square" anchor="t" lIns="0" rIns="0" tIns="0" bIns="0">
+          <a:bodyPr wrap="square" lIns="0" tIns="0" rIns="0" bIns="0" anchor="t">
             <a:spAutoFit/>
           </a:bodyPr>
           <a:lstStyle/>
@@ -4939,7 +4973,7 @@
 </file>
 
 <file path=ppt/slides/slide11.xml><?xml version="1.0" encoding="utf-8"?>
-<p:sld xmlns:a="http://schemas.openxmlformats.org/drawingml/2006/main" xmlns:p="http://schemas.openxmlformats.org/presentationml/2006/main" xmlns:r="http://schemas.openxmlformats.org/officeDocument/2006/relationships">
+<p:sld xmlns:a="http://schemas.openxmlformats.org/drawingml/2006/main" xmlns:r="http://schemas.openxmlformats.org/officeDocument/2006/relationships" xmlns:p="http://schemas.openxmlformats.org/presentationml/2006/main">
   <p:cSld>
     <p:spTree>
       <p:nvGrpSpPr>
@@ -4947,7 +4981,14 @@
         <p:cNvGrpSpPr/>
         <p:nvPr/>
       </p:nvGrpSpPr>
-      <p:grpSpPr/>
+      <p:grpSpPr>
+        <a:xfrm>
+          <a:off x="0" y="0"/>
+          <a:ext cx="0" cy="0"/>
+          <a:chOff x="0" y="0"/>
+          <a:chExt cx="0" cy="0"/>
+        </a:xfrm>
+      </p:grpSpPr>
       <p:sp>
         <p:nvSpPr>
           <p:cNvPr id="2" name="Rectangle 1"/>
@@ -4989,6 +5030,7 @@
           <a:lstStyle/>
           <a:p>
             <a:pPr algn="ctr"/>
+            <a:endParaRPr/>
           </a:p>
         </p:txBody>
       </p:sp>
@@ -5009,7 +5051,7 @@
           <a:noFill/>
         </p:spPr>
         <p:txBody>
-          <a:bodyPr wrap="square" anchor="t" lIns="0" rIns="0" tIns="0" bIns="0">
+          <a:bodyPr wrap="square" lIns="0" tIns="0" rIns="0" bIns="0" anchor="t">
             <a:spAutoFit/>
           </a:bodyPr>
           <a:lstStyle/>
@@ -5044,7 +5086,7 @@
           <a:noFill/>
         </p:spPr>
         <p:txBody>
-          <a:bodyPr wrap="square" anchor="t" lIns="0" rIns="0" tIns="0" bIns="0">
+          <a:bodyPr wrap="square" lIns="0" tIns="0" rIns="0" bIns="0" anchor="t">
             <a:spAutoFit/>
           </a:bodyPr>
           <a:lstStyle/>
@@ -5103,6 +5145,7 @@
           <a:lstStyle/>
           <a:p>
             <a:pPr algn="ctr"/>
+            <a:endParaRPr/>
           </a:p>
         </p:txBody>
       </p:sp>
@@ -5149,6 +5192,7 @@
           <a:lstStyle/>
           <a:p>
             <a:pPr algn="ctr"/>
+            <a:endParaRPr/>
           </a:p>
         </p:txBody>
       </p:sp>
@@ -5193,6 +5237,7 @@
           <a:lstStyle/>
           <a:p>
             <a:pPr algn="ctr"/>
+            <a:endParaRPr/>
           </a:p>
         </p:txBody>
       </p:sp>
@@ -5213,7 +5258,7 @@
           <a:noFill/>
         </p:spPr>
         <p:txBody>
-          <a:bodyPr wrap="square" anchor="t" lIns="0" rIns="0" tIns="0" bIns="0">
+          <a:bodyPr wrap="square" lIns="0" tIns="0" rIns="0" bIns="0" anchor="t">
             <a:spAutoFit/>
           </a:bodyPr>
           <a:lstStyle/>
@@ -5447,6 +5492,7 @@
           <a:lstStyle/>
           <a:p>
             <a:pPr algn="ctr"/>
+            <a:endParaRPr/>
           </a:p>
         </p:txBody>
       </p:sp>
@@ -5491,6 +5537,7 @@
           <a:lstStyle/>
           <a:p>
             <a:pPr algn="ctr"/>
+            <a:endParaRPr/>
           </a:p>
         </p:txBody>
       </p:sp>
@@ -5511,7 +5558,7 @@
           <a:noFill/>
         </p:spPr>
         <p:txBody>
-          <a:bodyPr wrap="square" anchor="t" lIns="0" rIns="0" tIns="0" bIns="0">
+          <a:bodyPr wrap="square" lIns="0" tIns="0" rIns="0" bIns="0" anchor="t">
             <a:spAutoFit/>
           </a:bodyPr>
           <a:lstStyle/>
@@ -5538,7 +5585,7 @@
         <p:spPr>
           <a:xfrm>
             <a:off x="4526280" y="2468880"/>
-            <a:ext cx="3337560" cy="3840480"/>
+            <a:ext cx="3337560" cy="1790234"/>
           </a:xfrm>
           <a:prstGeom prst="rect">
             <a:avLst/>
@@ -5557,7 +5604,7 @@
               </a:spcAft>
             </a:pPr>
             <a:r>
-              <a:rPr sz="1100" b="1">
+              <a:rPr sz="1100" b="1" dirty="0">
                 <a:solidFill>
                   <a:srgbClr val="2563EB"/>
                 </a:solidFill>
@@ -5566,13 +5613,13 @@
               <a:t>•  </a:t>
             </a:r>
             <a:r>
-              <a:rPr sz="1100">
+              <a:rPr sz="1100" dirty="0">
                 <a:solidFill>
                   <a:srgbClr val="1E293B"/>
                 </a:solidFill>
                 <a:latin typeface="Calibri"/>
               </a:rPr>
-              <a:t>Signature field enhancements (pen colour, type-to-sign, save to profile)</a:t>
+              <a:t>Dashboard system-health widget (snapshot age, disk usage, doc counts)</a:t>
             </a:r>
           </a:p>
           <a:p>
@@ -5582,7 +5629,7 @@
               </a:spcAft>
             </a:pPr>
             <a:r>
-              <a:rPr sz="1100" b="1">
+              <a:rPr sz="1100" b="1" dirty="0">
                 <a:solidFill>
                   <a:srgbClr val="2563EB"/>
                 </a:solidFill>
@@ -5591,13 +5638,13 @@
               <a:t>•  </a:t>
             </a:r>
             <a:r>
-              <a:rPr sz="1100">
+              <a:rPr sz="1100" dirty="0">
                 <a:solidFill>
                   <a:srgbClr val="1E293B"/>
                 </a:solidFill>
                 <a:latin typeface="Calibri"/>
               </a:rPr>
-              <a:t>Dashboard system-health widget (snapshot age, disk usage, doc counts)</a:t>
+              <a:t>Backup verification endpoint</a:t>
             </a:r>
           </a:p>
           <a:p>
@@ -5607,7 +5654,7 @@
               </a:spcAft>
             </a:pPr>
             <a:r>
-              <a:rPr sz="1100" b="1">
+              <a:rPr sz="1100" b="1" dirty="0">
                 <a:solidFill>
                   <a:srgbClr val="2563EB"/>
                 </a:solidFill>
@@ -5616,13 +5663,69 @@
               <a:t>•  </a:t>
             </a:r>
             <a:r>
-              <a:rPr sz="1100">
+              <a:rPr sz="1100" dirty="0">
                 <a:solidFill>
                   <a:srgbClr val="1E293B"/>
                 </a:solidFill>
                 <a:latin typeface="Calibri"/>
               </a:rPr>
-              <a:t>Backup verification endpoint</a:t>
+              <a:t>Bulk file actions (multi-select + zip / delete)</a:t>
+            </a:r>
+            <a:endParaRPr lang="en-IN" sz="1100" dirty="0">
+              <a:solidFill>
+                <a:srgbClr val="1E293B"/>
+              </a:solidFill>
+              <a:latin typeface="Calibri"/>
+            </a:endParaRPr>
+          </a:p>
+          <a:p>
+            <a:pPr>
+              <a:spcAft>
+                <a:spcPts val="800"/>
+              </a:spcAft>
+            </a:pPr>
+            <a:r>
+              <a:rPr lang="en-IN" sz="1100" b="1" dirty="0">
+                <a:solidFill>
+                  <a:srgbClr val="2563EB"/>
+                </a:solidFill>
+                <a:latin typeface="Calibri"/>
+              </a:rPr>
+              <a:t>•  </a:t>
+            </a:r>
+            <a:r>
+              <a:rPr lang="en-IN" sz="1100" dirty="0">
+                <a:solidFill>
+                  <a:srgbClr val="1E293B"/>
+                </a:solidFill>
+                <a:latin typeface="Calibri"/>
+              </a:rPr>
+              <a:t>AI Chat Box integration.</a:t>
+            </a:r>
+          </a:p>
+          <a:p>
+            <a:pPr>
+              <a:spcAft>
+                <a:spcPts val="800"/>
+              </a:spcAft>
+            </a:pPr>
+            <a:r>
+              <a:rPr lang="en-IN" sz="1100" b="1" dirty="0">
+                <a:solidFill>
+                  <a:srgbClr val="2563EB"/>
+                </a:solidFill>
+                <a:latin typeface="Calibri"/>
+              </a:rPr>
+              <a:t>•  </a:t>
+            </a:r>
+            <a:r>
+              <a:rPr lang="en-IN" sz="1100" dirty="0">
+                <a:solidFill>
+                  <a:srgbClr val="1E293B"/>
+                </a:solidFill>
+                <a:latin typeface="Calibri"/>
+              </a:rPr>
+              <a:t>AI Integration for Form Creation.</a:t>
             </a:r>
           </a:p>
           <a:p>
@@ -5631,24 +5734,12 @@
                 <a:spcPts val="800"/>
               </a:spcAft>
             </a:pPr>
-            <a:r>
-              <a:rPr sz="1100" b="1">
-                <a:solidFill>
-                  <a:srgbClr val="2563EB"/>
-                </a:solidFill>
-                <a:latin typeface="Calibri"/>
-              </a:rPr>
-              <a:t>•  </a:t>
-            </a:r>
-            <a:r>
-              <a:rPr sz="1100">
-                <a:solidFill>
-                  <a:srgbClr val="1E293B"/>
-                </a:solidFill>
-                <a:latin typeface="Calibri"/>
-              </a:rPr>
-              <a:t>Bulk file actions (multi-select + zip / delete)</a:t>
-            </a:r>
+            <a:endParaRPr sz="1100" dirty="0">
+              <a:solidFill>
+                <a:srgbClr val="1E293B"/>
+              </a:solidFill>
+              <a:latin typeface="Calibri"/>
+            </a:endParaRPr>
           </a:p>
         </p:txBody>
       </p:sp>
@@ -5695,6 +5786,7 @@
           <a:lstStyle/>
           <a:p>
             <a:pPr algn="ctr"/>
+            <a:endParaRPr/>
           </a:p>
         </p:txBody>
       </p:sp>
@@ -5739,6 +5831,7 @@
           <a:lstStyle/>
           <a:p>
             <a:pPr algn="ctr"/>
+            <a:endParaRPr/>
           </a:p>
         </p:txBody>
       </p:sp>
@@ -5759,7 +5852,7 @@
           <a:noFill/>
         </p:spPr>
         <p:txBody>
-          <a:bodyPr wrap="square" anchor="t" lIns="0" rIns="0" tIns="0" bIns="0">
+          <a:bodyPr wrap="square" lIns="0" tIns="0" rIns="0" bIns="0" anchor="t">
             <a:spAutoFit/>
           </a:bodyPr>
           <a:lstStyle/>
@@ -5786,7 +5879,7 @@
         <p:spPr>
           <a:xfrm>
             <a:off x="8366760" y="2468880"/>
-            <a:ext cx="3337560" cy="3840480"/>
+            <a:ext cx="3337560" cy="2436564"/>
           </a:xfrm>
           <a:prstGeom prst="rect">
             <a:avLst/>
@@ -5805,7 +5898,7 @@
               </a:spcAft>
             </a:pPr>
             <a:r>
-              <a:rPr sz="1100" b="1">
+              <a:rPr sz="1100" b="1" dirty="0">
                 <a:solidFill>
                   <a:srgbClr val="2563EB"/>
                 </a:solidFill>
@@ -5814,7 +5907,7 @@
               <a:t>•  </a:t>
             </a:r>
             <a:r>
-              <a:rPr sz="1100">
+              <a:rPr sz="1100" dirty="0">
                 <a:solidFill>
                   <a:srgbClr val="1E293B"/>
                 </a:solidFill>
@@ -5830,7 +5923,7 @@
               </a:spcAft>
             </a:pPr>
             <a:r>
-              <a:rPr sz="1100" b="1">
+              <a:rPr sz="1100" b="1" dirty="0">
                 <a:solidFill>
                   <a:srgbClr val="2563EB"/>
                 </a:solidFill>
@@ -5839,7 +5932,7 @@
               <a:t>•  </a:t>
             </a:r>
             <a:r>
-              <a:rPr sz="1100">
+              <a:rPr sz="1100" dirty="0">
                 <a:solidFill>
                   <a:srgbClr val="1E293B"/>
                 </a:solidFill>
@@ -5855,7 +5948,7 @@
               </a:spcAft>
             </a:pPr>
             <a:r>
-              <a:rPr sz="1100" b="1">
+              <a:rPr sz="1100" b="1" dirty="0">
                 <a:solidFill>
                   <a:srgbClr val="2563EB"/>
                 </a:solidFill>
@@ -5864,7 +5957,7 @@
               <a:t>•  </a:t>
             </a:r>
             <a:r>
-              <a:rPr sz="1100">
+              <a:rPr sz="1100" dirty="0">
                 <a:solidFill>
                   <a:srgbClr val="1E293B"/>
                 </a:solidFill>
@@ -5880,7 +5973,7 @@
               </a:spcAft>
             </a:pPr>
             <a:r>
-              <a:rPr sz="1100" b="1">
+              <a:rPr sz="1100" b="1" dirty="0">
                 <a:solidFill>
                   <a:srgbClr val="2563EB"/>
                 </a:solidFill>
@@ -5889,7 +5982,7 @@
               <a:t>•  </a:t>
             </a:r>
             <a:r>
-              <a:rPr sz="1100">
+              <a:rPr sz="1100" dirty="0">
                 <a:solidFill>
                   <a:srgbClr val="1E293B"/>
                 </a:solidFill>
@@ -5905,7 +5998,7 @@
               </a:spcAft>
             </a:pPr>
             <a:r>
-              <a:rPr sz="1100" b="1">
+              <a:rPr sz="1100" b="1" dirty="0">
                 <a:solidFill>
                   <a:srgbClr val="2563EB"/>
                 </a:solidFill>
@@ -5914,7 +6007,7 @@
               <a:t>•  </a:t>
             </a:r>
             <a:r>
-              <a:rPr sz="1100">
+              <a:rPr sz="1100" dirty="0">
                 <a:solidFill>
                   <a:srgbClr val="1E293B"/>
                 </a:solidFill>
@@ -5922,6 +6015,86 @@
               </a:rPr>
               <a:t>S3-compatible remote backup target</a:t>
             </a:r>
+            <a:endParaRPr lang="en-IN" sz="1100" dirty="0">
+              <a:solidFill>
+                <a:srgbClr val="1E293B"/>
+              </a:solidFill>
+              <a:latin typeface="Calibri"/>
+            </a:endParaRPr>
+          </a:p>
+          <a:p>
+            <a:pPr>
+              <a:spcAft>
+                <a:spcPts val="800"/>
+              </a:spcAft>
+            </a:pPr>
+            <a:r>
+              <a:rPr lang="en-IN" sz="1100" b="1" dirty="0">
+                <a:solidFill>
+                  <a:srgbClr val="2563EB"/>
+                </a:solidFill>
+              </a:rPr>
+              <a:t>•  </a:t>
+            </a:r>
+            <a:r>
+              <a:rPr lang="en-IN" sz="1100" dirty="0">
+                <a:solidFill>
+                  <a:srgbClr val="1E293B"/>
+                </a:solidFill>
+                <a:latin typeface="Calibri"/>
+              </a:rPr>
+              <a:t>RCA Chat Box analysis purpose.</a:t>
+            </a:r>
+          </a:p>
+          <a:p>
+            <a:pPr>
+              <a:spcAft>
+                <a:spcPts val="800"/>
+              </a:spcAft>
+            </a:pPr>
+            <a:r>
+              <a:rPr lang="en-IN" sz="1100" b="1" dirty="0">
+                <a:solidFill>
+                  <a:srgbClr val="2563EB"/>
+                </a:solidFill>
+              </a:rPr>
+              <a:t>•  </a:t>
+            </a:r>
+            <a:r>
+              <a:rPr lang="en-IN" sz="1100" dirty="0">
+                <a:solidFill>
+                  <a:srgbClr val="1E293B"/>
+                </a:solidFill>
+                <a:latin typeface="Calibri"/>
+              </a:rPr>
+              <a:t>Photo Recognition for PPE and approval.</a:t>
+            </a:r>
+          </a:p>
+          <a:p>
+            <a:pPr>
+              <a:spcAft>
+                <a:spcPts val="800"/>
+              </a:spcAft>
+            </a:pPr>
+            <a:endParaRPr lang="en-IN" sz="1100" dirty="0">
+              <a:solidFill>
+                <a:srgbClr val="1E293B"/>
+              </a:solidFill>
+              <a:latin typeface="Calibri"/>
+            </a:endParaRPr>
+          </a:p>
+          <a:p>
+            <a:pPr algn="l">
+              <a:spcAft>
+                <a:spcPts val="800"/>
+              </a:spcAft>
+            </a:pPr>
+            <a:endParaRPr sz="1100" dirty="0">
+              <a:solidFill>
+                <a:srgbClr val="1E293B"/>
+              </a:solidFill>
+              <a:latin typeface="Calibri"/>
+            </a:endParaRPr>
           </a:p>
         </p:txBody>
       </p:sp>
@@ -5942,7 +6115,7 @@
           <a:noFill/>
         </p:spPr>
         <p:txBody>
-          <a:bodyPr wrap="square" anchor="t" lIns="0" rIns="0" tIns="0" bIns="0">
+          <a:bodyPr wrap="square" lIns="0" tIns="0" rIns="0" bIns="0" anchor="t">
             <a:spAutoFit/>
           </a:bodyPr>
           <a:lstStyle/>
@@ -5977,7 +6150,7 @@
           <a:noFill/>
         </p:spPr>
         <p:txBody>
-          <a:bodyPr wrap="square" anchor="t" lIns="0" rIns="0" tIns="0" bIns="0">
+          <a:bodyPr wrap="square" lIns="0" tIns="0" rIns="0" bIns="0" anchor="t">
             <a:spAutoFit/>
           </a:bodyPr>
           <a:lstStyle/>
@@ -6004,7 +6177,7 @@
 </file>
 
 <file path=ppt/slides/slide12.xml><?xml version="1.0" encoding="utf-8"?>
-<p:sld xmlns:a="http://schemas.openxmlformats.org/drawingml/2006/main" xmlns:p="http://schemas.openxmlformats.org/presentationml/2006/main" xmlns:r="http://schemas.openxmlformats.org/officeDocument/2006/relationships">
+<p:sld xmlns:a="http://schemas.openxmlformats.org/drawingml/2006/main" xmlns:r="http://schemas.openxmlformats.org/officeDocument/2006/relationships" xmlns:p="http://schemas.openxmlformats.org/presentationml/2006/main">
   <p:cSld>
     <p:spTree>
       <p:nvGrpSpPr>
@@ -6012,7 +6185,14 @@
         <p:cNvGrpSpPr/>
         <p:nvPr/>
       </p:nvGrpSpPr>
-      <p:grpSpPr/>
+      <p:grpSpPr>
+        <a:xfrm>
+          <a:off x="0" y="0"/>
+          <a:ext cx="0" cy="0"/>
+          <a:chOff x="0" y="0"/>
+          <a:chExt cx="0" cy="0"/>
+        </a:xfrm>
+      </p:grpSpPr>
       <p:sp>
         <p:nvSpPr>
           <p:cNvPr id="2" name="Rectangle 1"/>
@@ -6054,6 +6234,7 @@
           <a:lstStyle/>
           <a:p>
             <a:pPr algn="ctr"/>
+            <a:endParaRPr/>
           </a:p>
         </p:txBody>
       </p:sp>
@@ -6098,6 +6279,7 @@
           <a:lstStyle/>
           <a:p>
             <a:pPr algn="ctr"/>
+            <a:endParaRPr/>
           </a:p>
         </p:txBody>
       </p:sp>
@@ -6118,7 +6300,7 @@
           <a:noFill/>
         </p:spPr>
         <p:txBody>
-          <a:bodyPr wrap="square" anchor="t" lIns="0" rIns="0" tIns="0" bIns="0">
+          <a:bodyPr wrap="square" lIns="0" tIns="0" rIns="0" bIns="0" anchor="t">
             <a:spAutoFit/>
           </a:bodyPr>
           <a:lstStyle/>
@@ -6153,7 +6335,7 @@
           <a:noFill/>
         </p:spPr>
         <p:txBody>
-          <a:bodyPr wrap="square" anchor="t" lIns="0" rIns="0" tIns="0" bIns="0">
+          <a:bodyPr wrap="square" lIns="0" tIns="0" rIns="0" bIns="0" anchor="t">
             <a:spAutoFit/>
           </a:bodyPr>
           <a:lstStyle/>
@@ -6188,7 +6370,7 @@
           <a:noFill/>
         </p:spPr>
         <p:txBody>
-          <a:bodyPr wrap="square" anchor="t" lIns="0" rIns="0" tIns="0" bIns="0">
+          <a:bodyPr wrap="square" lIns="0" tIns="0" rIns="0" bIns="0" anchor="t">
             <a:spAutoFit/>
           </a:bodyPr>
           <a:lstStyle/>
@@ -6215,7 +6397,7 @@
 </file>
 
 <file path=ppt/slides/slide2.xml><?xml version="1.0" encoding="utf-8"?>
-<p:sld xmlns:a="http://schemas.openxmlformats.org/drawingml/2006/main" xmlns:p="http://schemas.openxmlformats.org/presentationml/2006/main" xmlns:r="http://schemas.openxmlformats.org/officeDocument/2006/relationships">
+<p:sld xmlns:a="http://schemas.openxmlformats.org/drawingml/2006/main" xmlns:r="http://schemas.openxmlformats.org/officeDocument/2006/relationships" xmlns:p="http://schemas.openxmlformats.org/presentationml/2006/main">
   <p:cSld>
     <p:spTree>
       <p:nvGrpSpPr>
@@ -6223,7 +6405,14 @@
         <p:cNvGrpSpPr/>
         <p:nvPr/>
       </p:nvGrpSpPr>
-      <p:grpSpPr/>
+      <p:grpSpPr>
+        <a:xfrm>
+          <a:off x="0" y="0"/>
+          <a:ext cx="0" cy="0"/>
+          <a:chOff x="0" y="0"/>
+          <a:chExt cx="0" cy="0"/>
+        </a:xfrm>
+      </p:grpSpPr>
       <p:sp>
         <p:nvSpPr>
           <p:cNvPr id="2" name="Rectangle 1"/>
@@ -6265,6 +6454,7 @@
           <a:lstStyle/>
           <a:p>
             <a:pPr algn="ctr"/>
+            <a:endParaRPr/>
           </a:p>
         </p:txBody>
       </p:sp>
@@ -6285,7 +6475,7 @@
           <a:noFill/>
         </p:spPr>
         <p:txBody>
-          <a:bodyPr wrap="square" anchor="t" lIns="0" rIns="0" tIns="0" bIns="0">
+          <a:bodyPr wrap="square" lIns="0" tIns="0" rIns="0" bIns="0" anchor="t">
             <a:spAutoFit/>
           </a:bodyPr>
           <a:lstStyle/>
@@ -6320,7 +6510,7 @@
           <a:noFill/>
         </p:spPr>
         <p:txBody>
-          <a:bodyPr wrap="square" anchor="t" lIns="0" rIns="0" tIns="0" bIns="0">
+          <a:bodyPr wrap="square" lIns="0" tIns="0" rIns="0" bIns="0" anchor="t">
             <a:spAutoFit/>
           </a:bodyPr>
           <a:lstStyle/>
@@ -6379,6 +6569,7 @@
           <a:lstStyle/>
           <a:p>
             <a:pPr algn="ctr"/>
+            <a:endParaRPr/>
           </a:p>
         </p:txBody>
       </p:sp>
@@ -6399,7 +6590,7 @@
           <a:noFill/>
         </p:spPr>
         <p:txBody>
-          <a:bodyPr wrap="square" anchor="t" lIns="0" rIns="0" tIns="0" bIns="0">
+          <a:bodyPr wrap="square" lIns="0" tIns="0" rIns="0" bIns="0" anchor="t">
             <a:spAutoFit/>
           </a:bodyPr>
           <a:lstStyle/>
@@ -6434,7 +6625,7 @@
           <a:noFill/>
         </p:spPr>
         <p:txBody>
-          <a:bodyPr wrap="square" anchor="t" lIns="0" rIns="0" tIns="0" bIns="0">
+          <a:bodyPr wrap="square" lIns="0" tIns="0" rIns="0" bIns="0" anchor="t">
             <a:spAutoFit/>
           </a:bodyPr>
           <a:lstStyle/>
@@ -6469,7 +6660,7 @@
           <a:noFill/>
         </p:spPr>
         <p:txBody>
-          <a:bodyPr wrap="square" anchor="t" lIns="0" rIns="0" tIns="0" bIns="0">
+          <a:bodyPr wrap="square" lIns="0" tIns="0" rIns="0" bIns="0" anchor="t">
             <a:spAutoFit/>
           </a:bodyPr>
           <a:lstStyle/>
@@ -6602,7 +6793,7 @@
           <a:noFill/>
         </p:spPr>
         <p:txBody>
-          <a:bodyPr wrap="square" anchor="t" lIns="0" rIns="0" tIns="0" bIns="0">
+          <a:bodyPr wrap="square" lIns="0" tIns="0" rIns="0" bIns="0" anchor="t">
             <a:spAutoFit/>
           </a:bodyPr>
           <a:lstStyle/>
@@ -6735,7 +6926,7 @@
           <a:noFill/>
         </p:spPr>
         <p:txBody>
-          <a:bodyPr wrap="square" anchor="t" lIns="0" rIns="0" tIns="0" bIns="0">
+          <a:bodyPr wrap="square" lIns="0" tIns="0" rIns="0" bIns="0" anchor="t">
             <a:spAutoFit/>
           </a:bodyPr>
           <a:lstStyle/>
@@ -6770,7 +6961,7 @@
           <a:noFill/>
         </p:spPr>
         <p:txBody>
-          <a:bodyPr wrap="square" anchor="t" lIns="0" rIns="0" tIns="0" bIns="0">
+          <a:bodyPr wrap="square" lIns="0" tIns="0" rIns="0" bIns="0" anchor="t">
             <a:spAutoFit/>
           </a:bodyPr>
           <a:lstStyle/>
@@ -6797,7 +6988,7 @@
 </file>
 
 <file path=ppt/slides/slide3.xml><?xml version="1.0" encoding="utf-8"?>
-<p:sld xmlns:a="http://schemas.openxmlformats.org/drawingml/2006/main" xmlns:p="http://schemas.openxmlformats.org/presentationml/2006/main" xmlns:r="http://schemas.openxmlformats.org/officeDocument/2006/relationships">
+<p:sld xmlns:a="http://schemas.openxmlformats.org/drawingml/2006/main" xmlns:r="http://schemas.openxmlformats.org/officeDocument/2006/relationships" xmlns:p="http://schemas.openxmlformats.org/presentationml/2006/main">
   <p:cSld>
     <p:spTree>
       <p:nvGrpSpPr>
@@ -6805,7 +6996,14 @@
         <p:cNvGrpSpPr/>
         <p:nvPr/>
       </p:nvGrpSpPr>
-      <p:grpSpPr/>
+      <p:grpSpPr>
+        <a:xfrm>
+          <a:off x="0" y="0"/>
+          <a:ext cx="0" cy="0"/>
+          <a:chOff x="0" y="0"/>
+          <a:chExt cx="0" cy="0"/>
+        </a:xfrm>
+      </p:grpSpPr>
       <p:sp>
         <p:nvSpPr>
           <p:cNvPr id="2" name="Rectangle 1"/>
@@ -6847,6 +7045,7 @@
           <a:lstStyle/>
           <a:p>
             <a:pPr algn="ctr"/>
+            <a:endParaRPr/>
           </a:p>
         </p:txBody>
       </p:sp>
@@ -6867,7 +7066,7 @@
           <a:noFill/>
         </p:spPr>
         <p:txBody>
-          <a:bodyPr wrap="square" anchor="t" lIns="0" rIns="0" tIns="0" bIns="0">
+          <a:bodyPr wrap="square" lIns="0" tIns="0" rIns="0" bIns="0" anchor="t">
             <a:spAutoFit/>
           </a:bodyPr>
           <a:lstStyle/>
@@ -6902,7 +7101,7 @@
           <a:noFill/>
         </p:spPr>
         <p:txBody>
-          <a:bodyPr wrap="square" anchor="t" lIns="0" rIns="0" tIns="0" bIns="0">
+          <a:bodyPr wrap="square" lIns="0" tIns="0" rIns="0" bIns="0" anchor="t">
             <a:spAutoFit/>
           </a:bodyPr>
           <a:lstStyle/>
@@ -6961,6 +7160,7 @@
           <a:lstStyle/>
           <a:p>
             <a:pPr algn="ctr"/>
+            <a:endParaRPr/>
           </a:p>
         </p:txBody>
       </p:sp>
@@ -7005,6 +7205,7 @@
           <a:lstStyle/>
           <a:p>
             <a:pPr algn="ctr"/>
+            <a:endParaRPr/>
           </a:p>
         </p:txBody>
       </p:sp>
@@ -7049,6 +7250,7 @@
           <a:lstStyle/>
           <a:p>
             <a:pPr algn="ctr"/>
+            <a:endParaRPr/>
           </a:p>
         </p:txBody>
       </p:sp>
@@ -7069,7 +7271,7 @@
           <a:noFill/>
         </p:spPr>
         <p:txBody>
-          <a:bodyPr wrap="square" anchor="t" lIns="0" rIns="0" tIns="0" bIns="0">
+          <a:bodyPr wrap="square" lIns="0" tIns="0" rIns="0" bIns="0" anchor="t">
             <a:spAutoFit/>
           </a:bodyPr>
           <a:lstStyle/>
@@ -7104,7 +7306,7 @@
           <a:noFill/>
         </p:spPr>
         <p:txBody>
-          <a:bodyPr wrap="square" anchor="t" lIns="0" rIns="0" tIns="0" bIns="0">
+          <a:bodyPr wrap="square" lIns="0" tIns="0" rIns="0" bIns="0" anchor="t">
             <a:spAutoFit/>
           </a:bodyPr>
           <a:lstStyle/>
@@ -7163,6 +7365,7 @@
           <a:lstStyle/>
           <a:p>
             <a:pPr algn="ctr"/>
+            <a:endParaRPr/>
           </a:p>
         </p:txBody>
       </p:sp>
@@ -7207,6 +7410,7 @@
           <a:lstStyle/>
           <a:p>
             <a:pPr algn="ctr"/>
+            <a:endParaRPr/>
           </a:p>
         </p:txBody>
       </p:sp>
@@ -7227,7 +7431,7 @@
           <a:noFill/>
         </p:spPr>
         <p:txBody>
-          <a:bodyPr wrap="square" anchor="t" lIns="0" rIns="0" tIns="0" bIns="0">
+          <a:bodyPr wrap="square" lIns="0" tIns="0" rIns="0" bIns="0" anchor="t">
             <a:spAutoFit/>
           </a:bodyPr>
           <a:lstStyle/>
@@ -7262,7 +7466,7 @@
           <a:noFill/>
         </p:spPr>
         <p:txBody>
-          <a:bodyPr wrap="square" anchor="t" lIns="0" rIns="0" tIns="0" bIns="0">
+          <a:bodyPr wrap="square" lIns="0" tIns="0" rIns="0" bIns="0" anchor="t">
             <a:spAutoFit/>
           </a:bodyPr>
           <a:lstStyle/>
@@ -7321,6 +7525,7 @@
           <a:lstStyle/>
           <a:p>
             <a:pPr algn="ctr"/>
+            <a:endParaRPr/>
           </a:p>
         </p:txBody>
       </p:sp>
@@ -7365,6 +7570,7 @@
           <a:lstStyle/>
           <a:p>
             <a:pPr algn="ctr"/>
+            <a:endParaRPr/>
           </a:p>
         </p:txBody>
       </p:sp>
@@ -7385,7 +7591,7 @@
           <a:noFill/>
         </p:spPr>
         <p:txBody>
-          <a:bodyPr wrap="square" anchor="t" lIns="0" rIns="0" tIns="0" bIns="0">
+          <a:bodyPr wrap="square" lIns="0" tIns="0" rIns="0" bIns="0" anchor="t">
             <a:spAutoFit/>
           </a:bodyPr>
           <a:lstStyle/>
@@ -7420,7 +7626,7 @@
           <a:noFill/>
         </p:spPr>
         <p:txBody>
-          <a:bodyPr wrap="square" anchor="t" lIns="0" rIns="0" tIns="0" bIns="0">
+          <a:bodyPr wrap="square" lIns="0" tIns="0" rIns="0" bIns="0" anchor="t">
             <a:spAutoFit/>
           </a:bodyPr>
           <a:lstStyle/>
@@ -7479,6 +7685,7 @@
           <a:lstStyle/>
           <a:p>
             <a:pPr algn="ctr"/>
+            <a:endParaRPr/>
           </a:p>
         </p:txBody>
       </p:sp>
@@ -7523,6 +7730,7 @@
           <a:lstStyle/>
           <a:p>
             <a:pPr algn="ctr"/>
+            <a:endParaRPr/>
           </a:p>
         </p:txBody>
       </p:sp>
@@ -7543,7 +7751,7 @@
           <a:noFill/>
         </p:spPr>
         <p:txBody>
-          <a:bodyPr wrap="square" anchor="t" lIns="0" rIns="0" tIns="0" bIns="0">
+          <a:bodyPr wrap="square" lIns="0" tIns="0" rIns="0" bIns="0" anchor="t">
             <a:spAutoFit/>
           </a:bodyPr>
           <a:lstStyle/>
@@ -7578,7 +7786,7 @@
           <a:noFill/>
         </p:spPr>
         <p:txBody>
-          <a:bodyPr wrap="square" anchor="t" lIns="0" rIns="0" tIns="0" bIns="0">
+          <a:bodyPr wrap="square" lIns="0" tIns="0" rIns="0" bIns="0" anchor="t">
             <a:spAutoFit/>
           </a:bodyPr>
           <a:lstStyle/>
@@ -7613,7 +7821,7 @@
           <a:noFill/>
         </p:spPr>
         <p:txBody>
-          <a:bodyPr wrap="square" anchor="t" lIns="0" rIns="0" tIns="0" bIns="0">
+          <a:bodyPr wrap="square" lIns="0" tIns="0" rIns="0" bIns="0" anchor="t">
             <a:spAutoFit/>
           </a:bodyPr>
           <a:lstStyle/>
@@ -7648,7 +7856,7 @@
           <a:noFill/>
         </p:spPr>
         <p:txBody>
-          <a:bodyPr wrap="square" anchor="t" lIns="0" rIns="0" tIns="0" bIns="0">
+          <a:bodyPr wrap="square" lIns="0" tIns="0" rIns="0" bIns="0" anchor="t">
             <a:spAutoFit/>
           </a:bodyPr>
           <a:lstStyle/>
@@ -7675,7 +7883,7 @@
 </file>
 
 <file path=ppt/slides/slide4.xml><?xml version="1.0" encoding="utf-8"?>
-<p:sld xmlns:a="http://schemas.openxmlformats.org/drawingml/2006/main" xmlns:p="http://schemas.openxmlformats.org/presentationml/2006/main" xmlns:r="http://schemas.openxmlformats.org/officeDocument/2006/relationships">
+<p:sld xmlns:a="http://schemas.openxmlformats.org/drawingml/2006/main" xmlns:r="http://schemas.openxmlformats.org/officeDocument/2006/relationships" xmlns:p="http://schemas.openxmlformats.org/presentationml/2006/main">
   <p:cSld>
     <p:spTree>
       <p:nvGrpSpPr>
@@ -7683,7 +7891,14 @@
         <p:cNvGrpSpPr/>
         <p:nvPr/>
       </p:nvGrpSpPr>
-      <p:grpSpPr/>
+      <p:grpSpPr>
+        <a:xfrm>
+          <a:off x="0" y="0"/>
+          <a:ext cx="0" cy="0"/>
+          <a:chOff x="0" y="0"/>
+          <a:chExt cx="0" cy="0"/>
+        </a:xfrm>
+      </p:grpSpPr>
       <p:sp>
         <p:nvSpPr>
           <p:cNvPr id="2" name="Rectangle 1"/>
@@ -7725,6 +7940,7 @@
           <a:lstStyle/>
           <a:p>
             <a:pPr algn="ctr"/>
+            <a:endParaRPr/>
           </a:p>
         </p:txBody>
       </p:sp>
@@ -7745,7 +7961,7 @@
           <a:noFill/>
         </p:spPr>
         <p:txBody>
-          <a:bodyPr wrap="square" anchor="t" lIns="0" rIns="0" tIns="0" bIns="0">
+          <a:bodyPr wrap="square" lIns="0" tIns="0" rIns="0" bIns="0" anchor="t">
             <a:spAutoFit/>
           </a:bodyPr>
           <a:lstStyle/>
@@ -7780,7 +7996,7 @@
           <a:noFill/>
         </p:spPr>
         <p:txBody>
-          <a:bodyPr wrap="square" anchor="t" lIns="0" rIns="0" tIns="0" bIns="0">
+          <a:bodyPr wrap="square" lIns="0" tIns="0" rIns="0" bIns="0" anchor="t">
             <a:spAutoFit/>
           </a:bodyPr>
           <a:lstStyle/>
@@ -7839,6 +8055,7 @@
           <a:lstStyle/>
           <a:p>
             <a:pPr algn="ctr"/>
+            <a:endParaRPr/>
           </a:p>
         </p:txBody>
       </p:sp>
@@ -7885,6 +8102,7 @@
           <a:lstStyle/>
           <a:p>
             <a:pPr algn="ctr"/>
+            <a:endParaRPr/>
           </a:p>
         </p:txBody>
       </p:sp>
@@ -7929,6 +8147,7 @@
           <a:lstStyle/>
           <a:p>
             <a:pPr algn="ctr"/>
+            <a:endParaRPr/>
           </a:p>
         </p:txBody>
       </p:sp>
@@ -7949,7 +8168,7 @@
           <a:noFill/>
         </p:spPr>
         <p:txBody>
-          <a:bodyPr wrap="square" anchor="t" lIns="0" rIns="0" tIns="0" bIns="0">
+          <a:bodyPr wrap="square" lIns="0" tIns="0" rIns="0" bIns="0" anchor="t">
             <a:spAutoFit/>
           </a:bodyPr>
           <a:lstStyle/>
@@ -7984,7 +8203,7 @@
           <a:noFill/>
         </p:spPr>
         <p:txBody>
-          <a:bodyPr wrap="square" anchor="t" lIns="0" rIns="0" tIns="0" bIns="0">
+          <a:bodyPr wrap="square" lIns="0" tIns="0" rIns="0" bIns="0" anchor="t">
             <a:spAutoFit/>
           </a:bodyPr>
           <a:lstStyle/>
@@ -8045,6 +8264,7 @@
           <a:lstStyle/>
           <a:p>
             <a:pPr algn="ctr"/>
+            <a:endParaRPr/>
           </a:p>
         </p:txBody>
       </p:sp>
@@ -8089,6 +8309,7 @@
           <a:lstStyle/>
           <a:p>
             <a:pPr algn="ctr"/>
+            <a:endParaRPr/>
           </a:p>
         </p:txBody>
       </p:sp>
@@ -8109,7 +8330,7 @@
           <a:noFill/>
         </p:spPr>
         <p:txBody>
-          <a:bodyPr wrap="square" anchor="t" lIns="0" rIns="0" tIns="0" bIns="0">
+          <a:bodyPr wrap="square" lIns="0" tIns="0" rIns="0" bIns="0" anchor="t">
             <a:spAutoFit/>
           </a:bodyPr>
           <a:lstStyle/>
@@ -8144,7 +8365,7 @@
           <a:noFill/>
         </p:spPr>
         <p:txBody>
-          <a:bodyPr wrap="square" anchor="t" lIns="0" rIns="0" tIns="0" bIns="0">
+          <a:bodyPr wrap="square" lIns="0" tIns="0" rIns="0" bIns="0" anchor="t">
             <a:spAutoFit/>
           </a:bodyPr>
           <a:lstStyle/>
@@ -8205,6 +8426,7 @@
           <a:lstStyle/>
           <a:p>
             <a:pPr algn="ctr"/>
+            <a:endParaRPr/>
           </a:p>
         </p:txBody>
       </p:sp>
@@ -8249,6 +8471,7 @@
           <a:lstStyle/>
           <a:p>
             <a:pPr algn="ctr"/>
+            <a:endParaRPr/>
           </a:p>
         </p:txBody>
       </p:sp>
@@ -8269,7 +8492,7 @@
           <a:noFill/>
         </p:spPr>
         <p:txBody>
-          <a:bodyPr wrap="square" anchor="t" lIns="0" rIns="0" tIns="0" bIns="0">
+          <a:bodyPr wrap="square" lIns="0" tIns="0" rIns="0" bIns="0" anchor="t">
             <a:spAutoFit/>
           </a:bodyPr>
           <a:lstStyle/>
@@ -8304,7 +8527,7 @@
           <a:noFill/>
         </p:spPr>
         <p:txBody>
-          <a:bodyPr wrap="square" anchor="t" lIns="0" rIns="0" tIns="0" bIns="0">
+          <a:bodyPr wrap="square" lIns="0" tIns="0" rIns="0" bIns="0" anchor="t">
             <a:spAutoFit/>
           </a:bodyPr>
           <a:lstStyle/>
@@ -8365,6 +8588,7 @@
           <a:lstStyle/>
           <a:p>
             <a:pPr algn="ctr"/>
+            <a:endParaRPr/>
           </a:p>
         </p:txBody>
       </p:sp>
@@ -8409,6 +8633,7 @@
           <a:lstStyle/>
           <a:p>
             <a:pPr algn="ctr"/>
+            <a:endParaRPr/>
           </a:p>
         </p:txBody>
       </p:sp>
@@ -8429,7 +8654,7 @@
           <a:noFill/>
         </p:spPr>
         <p:txBody>
-          <a:bodyPr wrap="square" anchor="t" lIns="0" rIns="0" tIns="0" bIns="0">
+          <a:bodyPr wrap="square" lIns="0" tIns="0" rIns="0" bIns="0" anchor="t">
             <a:spAutoFit/>
           </a:bodyPr>
           <a:lstStyle/>
@@ -8464,7 +8689,7 @@
           <a:noFill/>
         </p:spPr>
         <p:txBody>
-          <a:bodyPr wrap="square" anchor="t" lIns="0" rIns="0" tIns="0" bIns="0">
+          <a:bodyPr wrap="square" lIns="0" tIns="0" rIns="0" bIns="0" anchor="t">
             <a:spAutoFit/>
           </a:bodyPr>
           <a:lstStyle/>
@@ -8525,6 +8750,7 @@
           <a:lstStyle/>
           <a:p>
             <a:pPr algn="ctr"/>
+            <a:endParaRPr/>
           </a:p>
         </p:txBody>
       </p:sp>
@@ -8569,6 +8795,7 @@
           <a:lstStyle/>
           <a:p>
             <a:pPr algn="ctr"/>
+            <a:endParaRPr/>
           </a:p>
         </p:txBody>
       </p:sp>
@@ -8589,7 +8816,7 @@
           <a:noFill/>
         </p:spPr>
         <p:txBody>
-          <a:bodyPr wrap="square" anchor="t" lIns="0" rIns="0" tIns="0" bIns="0">
+          <a:bodyPr wrap="square" lIns="0" tIns="0" rIns="0" bIns="0" anchor="t">
             <a:spAutoFit/>
           </a:bodyPr>
           <a:lstStyle/>
@@ -8624,7 +8851,7 @@
           <a:noFill/>
         </p:spPr>
         <p:txBody>
-          <a:bodyPr wrap="square" anchor="t" lIns="0" rIns="0" tIns="0" bIns="0">
+          <a:bodyPr wrap="square" lIns="0" tIns="0" rIns="0" bIns="0" anchor="t">
             <a:spAutoFit/>
           </a:bodyPr>
           <a:lstStyle/>
@@ -8685,6 +8912,7 @@
           <a:lstStyle/>
           <a:p>
             <a:pPr algn="ctr"/>
+            <a:endParaRPr/>
           </a:p>
         </p:txBody>
       </p:sp>
@@ -8729,6 +8957,7 @@
           <a:lstStyle/>
           <a:p>
             <a:pPr algn="ctr"/>
+            <a:endParaRPr/>
           </a:p>
         </p:txBody>
       </p:sp>
@@ -8749,7 +8978,7 @@
           <a:noFill/>
         </p:spPr>
         <p:txBody>
-          <a:bodyPr wrap="square" anchor="t" lIns="0" rIns="0" tIns="0" bIns="0">
+          <a:bodyPr wrap="square" lIns="0" tIns="0" rIns="0" bIns="0" anchor="t">
             <a:spAutoFit/>
           </a:bodyPr>
           <a:lstStyle/>
@@ -8784,7 +9013,7 @@
           <a:noFill/>
         </p:spPr>
         <p:txBody>
-          <a:bodyPr wrap="square" anchor="t" lIns="0" rIns="0" tIns="0" bIns="0">
+          <a:bodyPr wrap="square" lIns="0" tIns="0" rIns="0" bIns="0" anchor="t">
             <a:spAutoFit/>
           </a:bodyPr>
           <a:lstStyle/>
@@ -8819,7 +9048,7 @@
           <a:noFill/>
         </p:spPr>
         <p:txBody>
-          <a:bodyPr wrap="square" anchor="t" lIns="0" rIns="0" tIns="0" bIns="0">
+          <a:bodyPr wrap="square" lIns="0" tIns="0" rIns="0" bIns="0" anchor="t">
             <a:spAutoFit/>
           </a:bodyPr>
           <a:lstStyle/>
@@ -8854,7 +9083,7 @@
           <a:noFill/>
         </p:spPr>
         <p:txBody>
-          <a:bodyPr wrap="square" anchor="t" lIns="0" rIns="0" tIns="0" bIns="0">
+          <a:bodyPr wrap="square" lIns="0" tIns="0" rIns="0" bIns="0" anchor="t">
             <a:spAutoFit/>
           </a:bodyPr>
           <a:lstStyle/>
@@ -8881,7 +9110,7 @@
 </file>
 
 <file path=ppt/slides/slide5.xml><?xml version="1.0" encoding="utf-8"?>
-<p:sld xmlns:a="http://schemas.openxmlformats.org/drawingml/2006/main" xmlns:p="http://schemas.openxmlformats.org/presentationml/2006/main" xmlns:r="http://schemas.openxmlformats.org/officeDocument/2006/relationships">
+<p:sld xmlns:a="http://schemas.openxmlformats.org/drawingml/2006/main" xmlns:r="http://schemas.openxmlformats.org/officeDocument/2006/relationships" xmlns:p="http://schemas.openxmlformats.org/presentationml/2006/main">
   <p:cSld>
     <p:spTree>
       <p:nvGrpSpPr>
@@ -8889,7 +9118,14 @@
         <p:cNvGrpSpPr/>
         <p:nvPr/>
       </p:nvGrpSpPr>
-      <p:grpSpPr/>
+      <p:grpSpPr>
+        <a:xfrm>
+          <a:off x="0" y="0"/>
+          <a:ext cx="0" cy="0"/>
+          <a:chOff x="0" y="0"/>
+          <a:chExt cx="0" cy="0"/>
+        </a:xfrm>
+      </p:grpSpPr>
       <p:sp>
         <p:nvSpPr>
           <p:cNvPr id="2" name="Rectangle 1"/>
@@ -8931,6 +9167,7 @@
           <a:lstStyle/>
           <a:p>
             <a:pPr algn="ctr"/>
+            <a:endParaRPr/>
           </a:p>
         </p:txBody>
       </p:sp>
@@ -8951,7 +9188,7 @@
           <a:noFill/>
         </p:spPr>
         <p:txBody>
-          <a:bodyPr wrap="square" anchor="t" lIns="0" rIns="0" tIns="0" bIns="0">
+          <a:bodyPr wrap="square" lIns="0" tIns="0" rIns="0" bIns="0" anchor="t">
             <a:spAutoFit/>
           </a:bodyPr>
           <a:lstStyle/>
@@ -8986,7 +9223,7 @@
           <a:noFill/>
         </p:spPr>
         <p:txBody>
-          <a:bodyPr wrap="square" anchor="t" lIns="0" rIns="0" tIns="0" bIns="0">
+          <a:bodyPr wrap="square" lIns="0" tIns="0" rIns="0" bIns="0" anchor="t">
             <a:spAutoFit/>
           </a:bodyPr>
           <a:lstStyle/>
@@ -9045,6 +9282,7 @@
           <a:lstStyle/>
           <a:p>
             <a:pPr algn="ctr"/>
+            <a:endParaRPr/>
           </a:p>
         </p:txBody>
       </p:sp>
@@ -9338,7 +9576,7 @@
           <a:noFill/>
         </p:spPr>
         <p:txBody>
-          <a:bodyPr wrap="square" anchor="t" lIns="0" rIns="0" tIns="0" bIns="0">
+          <a:bodyPr wrap="square" lIns="0" tIns="0" rIns="0" bIns="0" anchor="t">
             <a:spAutoFit/>
           </a:bodyPr>
           <a:lstStyle/>
@@ -9373,7 +9611,7 @@
           <a:noFill/>
         </p:spPr>
         <p:txBody>
-          <a:bodyPr wrap="square" anchor="t" lIns="0" rIns="0" tIns="0" bIns="0">
+          <a:bodyPr wrap="square" lIns="0" tIns="0" rIns="0" bIns="0" anchor="t">
             <a:spAutoFit/>
           </a:bodyPr>
           <a:lstStyle/>
@@ -9400,7 +9638,7 @@
 </file>
 
 <file path=ppt/slides/slide6.xml><?xml version="1.0" encoding="utf-8"?>
-<p:sld xmlns:a="http://schemas.openxmlformats.org/drawingml/2006/main" xmlns:p="http://schemas.openxmlformats.org/presentationml/2006/main" xmlns:r="http://schemas.openxmlformats.org/officeDocument/2006/relationships">
+<p:sld xmlns:a="http://schemas.openxmlformats.org/drawingml/2006/main" xmlns:r="http://schemas.openxmlformats.org/officeDocument/2006/relationships" xmlns:p="http://schemas.openxmlformats.org/presentationml/2006/main">
   <p:cSld>
     <p:spTree>
       <p:nvGrpSpPr>
@@ -9408,7 +9646,14 @@
         <p:cNvGrpSpPr/>
         <p:nvPr/>
       </p:nvGrpSpPr>
-      <p:grpSpPr/>
+      <p:grpSpPr>
+        <a:xfrm>
+          <a:off x="0" y="0"/>
+          <a:ext cx="0" cy="0"/>
+          <a:chOff x="0" y="0"/>
+          <a:chExt cx="0" cy="0"/>
+        </a:xfrm>
+      </p:grpSpPr>
       <p:sp>
         <p:nvSpPr>
           <p:cNvPr id="2" name="Rectangle 1"/>
@@ -9450,6 +9695,7 @@
           <a:lstStyle/>
           <a:p>
             <a:pPr algn="ctr"/>
+            <a:endParaRPr/>
           </a:p>
         </p:txBody>
       </p:sp>
@@ -9470,7 +9716,7 @@
           <a:noFill/>
         </p:spPr>
         <p:txBody>
-          <a:bodyPr wrap="square" anchor="t" lIns="0" rIns="0" tIns="0" bIns="0">
+          <a:bodyPr wrap="square" lIns="0" tIns="0" rIns="0" bIns="0" anchor="t">
             <a:spAutoFit/>
           </a:bodyPr>
           <a:lstStyle/>
@@ -9505,7 +9751,7 @@
           <a:noFill/>
         </p:spPr>
         <p:txBody>
-          <a:bodyPr wrap="square" anchor="t" lIns="0" rIns="0" tIns="0" bIns="0">
+          <a:bodyPr wrap="square" lIns="0" tIns="0" rIns="0" bIns="0" anchor="t">
             <a:spAutoFit/>
           </a:bodyPr>
           <a:lstStyle/>
@@ -9564,6 +9810,7 @@
           <a:lstStyle/>
           <a:p>
             <a:pPr algn="ctr"/>
+            <a:endParaRPr/>
           </a:p>
         </p:txBody>
       </p:sp>
@@ -9584,7 +9831,7 @@
           <a:noFill/>
         </p:spPr>
         <p:txBody>
-          <a:bodyPr wrap="square" anchor="t" lIns="0" rIns="0" tIns="0" bIns="0">
+          <a:bodyPr wrap="square" lIns="0" tIns="0" rIns="0" bIns="0" anchor="t">
             <a:spAutoFit/>
           </a:bodyPr>
           <a:lstStyle/>
@@ -9645,6 +9892,7 @@
           <a:lstStyle/>
           <a:p>
             <a:pPr algn="ctr"/>
+            <a:endParaRPr/>
           </a:p>
         </p:txBody>
       </p:sp>
@@ -9689,6 +9937,7 @@
           <a:lstStyle/>
           <a:p>
             <a:pPr algn="ctr"/>
+            <a:endParaRPr/>
           </a:p>
         </p:txBody>
       </p:sp>
@@ -9709,7 +9958,7 @@
           <a:noFill/>
         </p:spPr>
         <p:txBody>
-          <a:bodyPr wrap="square" anchor="t" lIns="0" rIns="0" tIns="0" bIns="0">
+          <a:bodyPr wrap="square" lIns="0" tIns="0" rIns="0" bIns="0" anchor="t">
             <a:spAutoFit/>
           </a:bodyPr>
           <a:lstStyle/>
@@ -9744,7 +9993,7 @@
           <a:noFill/>
         </p:spPr>
         <p:txBody>
-          <a:bodyPr wrap="square" anchor="t" lIns="0" rIns="0" tIns="0" bIns="0">
+          <a:bodyPr wrap="square" lIns="0" tIns="0" rIns="0" bIns="0" anchor="t">
             <a:spAutoFit/>
           </a:bodyPr>
           <a:lstStyle/>
@@ -9805,6 +10054,7 @@
           <a:lstStyle/>
           <a:p>
             <a:pPr algn="ctr"/>
+            <a:endParaRPr/>
           </a:p>
         </p:txBody>
       </p:sp>
@@ -9849,6 +10099,7 @@
           <a:lstStyle/>
           <a:p>
             <a:pPr algn="ctr"/>
+            <a:endParaRPr/>
           </a:p>
         </p:txBody>
       </p:sp>
@@ -9869,7 +10120,7 @@
           <a:noFill/>
         </p:spPr>
         <p:txBody>
-          <a:bodyPr wrap="square" anchor="t" lIns="0" rIns="0" tIns="0" bIns="0">
+          <a:bodyPr wrap="square" lIns="0" tIns="0" rIns="0" bIns="0" anchor="t">
             <a:spAutoFit/>
           </a:bodyPr>
           <a:lstStyle/>
@@ -9904,7 +10155,7 @@
           <a:noFill/>
         </p:spPr>
         <p:txBody>
-          <a:bodyPr wrap="square" anchor="t" lIns="0" rIns="0" tIns="0" bIns="0">
+          <a:bodyPr wrap="square" lIns="0" tIns="0" rIns="0" bIns="0" anchor="t">
             <a:spAutoFit/>
           </a:bodyPr>
           <a:lstStyle/>
@@ -9965,6 +10216,7 @@
           <a:lstStyle/>
           <a:p>
             <a:pPr algn="ctr"/>
+            <a:endParaRPr/>
           </a:p>
         </p:txBody>
       </p:sp>
@@ -10009,6 +10261,7 @@
           <a:lstStyle/>
           <a:p>
             <a:pPr algn="ctr"/>
+            <a:endParaRPr/>
           </a:p>
         </p:txBody>
       </p:sp>
@@ -10029,7 +10282,7 @@
           <a:noFill/>
         </p:spPr>
         <p:txBody>
-          <a:bodyPr wrap="square" anchor="t" lIns="0" rIns="0" tIns="0" bIns="0">
+          <a:bodyPr wrap="square" lIns="0" tIns="0" rIns="0" bIns="0" anchor="t">
             <a:spAutoFit/>
           </a:bodyPr>
           <a:lstStyle/>
@@ -10064,7 +10317,7 @@
           <a:noFill/>
         </p:spPr>
         <p:txBody>
-          <a:bodyPr wrap="square" anchor="t" lIns="0" rIns="0" tIns="0" bIns="0">
+          <a:bodyPr wrap="square" lIns="0" tIns="0" rIns="0" bIns="0" anchor="t">
             <a:spAutoFit/>
           </a:bodyPr>
           <a:lstStyle/>
@@ -10125,6 +10378,7 @@
           <a:lstStyle/>
           <a:p>
             <a:pPr algn="ctr"/>
+            <a:endParaRPr/>
           </a:p>
         </p:txBody>
       </p:sp>
@@ -10169,6 +10423,7 @@
           <a:lstStyle/>
           <a:p>
             <a:pPr algn="ctr"/>
+            <a:endParaRPr/>
           </a:p>
         </p:txBody>
       </p:sp>
@@ -10189,7 +10444,7 @@
           <a:noFill/>
         </p:spPr>
         <p:txBody>
-          <a:bodyPr wrap="square" anchor="t" lIns="0" rIns="0" tIns="0" bIns="0">
+          <a:bodyPr wrap="square" lIns="0" tIns="0" rIns="0" bIns="0" anchor="t">
             <a:spAutoFit/>
           </a:bodyPr>
           <a:lstStyle/>
@@ -10224,7 +10479,7 @@
           <a:noFill/>
         </p:spPr>
         <p:txBody>
-          <a:bodyPr wrap="square" anchor="t" lIns="0" rIns="0" tIns="0" bIns="0">
+          <a:bodyPr wrap="square" lIns="0" tIns="0" rIns="0" bIns="0" anchor="t">
             <a:spAutoFit/>
           </a:bodyPr>
           <a:lstStyle/>
@@ -10285,6 +10540,7 @@
           <a:lstStyle/>
           <a:p>
             <a:pPr algn="ctr"/>
+            <a:endParaRPr/>
           </a:p>
         </p:txBody>
       </p:sp>
@@ -10329,6 +10585,7 @@
           <a:lstStyle/>
           <a:p>
             <a:pPr algn="ctr"/>
+            <a:endParaRPr/>
           </a:p>
         </p:txBody>
       </p:sp>
@@ -10349,7 +10606,7 @@
           <a:noFill/>
         </p:spPr>
         <p:txBody>
-          <a:bodyPr wrap="square" anchor="t" lIns="0" rIns="0" tIns="0" bIns="0">
+          <a:bodyPr wrap="square" lIns="0" tIns="0" rIns="0" bIns="0" anchor="t">
             <a:spAutoFit/>
           </a:bodyPr>
           <a:lstStyle/>
@@ -10384,7 +10641,7 @@
           <a:noFill/>
         </p:spPr>
         <p:txBody>
-          <a:bodyPr wrap="square" anchor="t" lIns="0" rIns="0" tIns="0" bIns="0">
+          <a:bodyPr wrap="square" lIns="0" tIns="0" rIns="0" bIns="0" anchor="t">
             <a:spAutoFit/>
           </a:bodyPr>
           <a:lstStyle/>
@@ -10419,7 +10676,7 @@
           <a:noFill/>
         </p:spPr>
         <p:txBody>
-          <a:bodyPr wrap="square" anchor="t" lIns="0" rIns="0" tIns="0" bIns="0">
+          <a:bodyPr wrap="square" lIns="0" tIns="0" rIns="0" bIns="0" anchor="t">
             <a:spAutoFit/>
           </a:bodyPr>
           <a:lstStyle/>
@@ -10677,7 +10934,7 @@
           <a:noFill/>
         </p:spPr>
         <p:txBody>
-          <a:bodyPr wrap="square" anchor="t" lIns="0" rIns="0" tIns="0" bIns="0">
+          <a:bodyPr wrap="square" lIns="0" tIns="0" rIns="0" bIns="0" anchor="t">
             <a:spAutoFit/>
           </a:bodyPr>
           <a:lstStyle/>
@@ -10712,7 +10969,7 @@
           <a:noFill/>
         </p:spPr>
         <p:txBody>
-          <a:bodyPr wrap="square" anchor="t" lIns="0" rIns="0" tIns="0" bIns="0">
+          <a:bodyPr wrap="square" lIns="0" tIns="0" rIns="0" bIns="0" anchor="t">
             <a:spAutoFit/>
           </a:bodyPr>
           <a:lstStyle/>
@@ -10739,7 +10996,7 @@
 </file>
 
 <file path=ppt/slides/slide7.xml><?xml version="1.0" encoding="utf-8"?>
-<p:sld xmlns:a="http://schemas.openxmlformats.org/drawingml/2006/main" xmlns:p="http://schemas.openxmlformats.org/presentationml/2006/main" xmlns:r="http://schemas.openxmlformats.org/officeDocument/2006/relationships">
+<p:sld xmlns:a="http://schemas.openxmlformats.org/drawingml/2006/main" xmlns:r="http://schemas.openxmlformats.org/officeDocument/2006/relationships" xmlns:p="http://schemas.openxmlformats.org/presentationml/2006/main">
   <p:cSld>
     <p:spTree>
       <p:nvGrpSpPr>
@@ -10747,7 +11004,14 @@
         <p:cNvGrpSpPr/>
         <p:nvPr/>
       </p:nvGrpSpPr>
-      <p:grpSpPr/>
+      <p:grpSpPr>
+        <a:xfrm>
+          <a:off x="0" y="0"/>
+          <a:ext cx="0" cy="0"/>
+          <a:chOff x="0" y="0"/>
+          <a:chExt cx="0" cy="0"/>
+        </a:xfrm>
+      </p:grpSpPr>
       <p:sp>
         <p:nvSpPr>
           <p:cNvPr id="2" name="Rectangle 1"/>
@@ -10789,6 +11053,7 @@
           <a:lstStyle/>
           <a:p>
             <a:pPr algn="ctr"/>
+            <a:endParaRPr/>
           </a:p>
         </p:txBody>
       </p:sp>
@@ -10809,7 +11074,7 @@
           <a:noFill/>
         </p:spPr>
         <p:txBody>
-          <a:bodyPr wrap="square" anchor="t" lIns="0" rIns="0" tIns="0" bIns="0">
+          <a:bodyPr wrap="square" lIns="0" tIns="0" rIns="0" bIns="0" anchor="t">
             <a:spAutoFit/>
           </a:bodyPr>
           <a:lstStyle/>
@@ -10844,7 +11109,7 @@
           <a:noFill/>
         </p:spPr>
         <p:txBody>
-          <a:bodyPr wrap="square" anchor="t" lIns="0" rIns="0" tIns="0" bIns="0">
+          <a:bodyPr wrap="square" lIns="0" tIns="0" rIns="0" bIns="0" anchor="t">
             <a:spAutoFit/>
           </a:bodyPr>
           <a:lstStyle/>
@@ -10903,6 +11168,7 @@
           <a:lstStyle/>
           <a:p>
             <a:pPr algn="ctr"/>
+            <a:endParaRPr/>
           </a:p>
         </p:txBody>
       </p:sp>
@@ -10947,6 +11213,7 @@
           <a:lstStyle/>
           <a:p>
             <a:pPr algn="ctr"/>
+            <a:endParaRPr/>
           </a:p>
         </p:txBody>
       </p:sp>
@@ -10967,7 +11234,7 @@
           <a:noFill/>
         </p:spPr>
         <p:txBody>
-          <a:bodyPr wrap="square" anchor="t" lIns="0" rIns="0" tIns="0" bIns="0">
+          <a:bodyPr wrap="square" lIns="0" tIns="0" rIns="0" bIns="0" anchor="t">
             <a:spAutoFit/>
           </a:bodyPr>
           <a:lstStyle/>
@@ -11002,7 +11269,7 @@
           <a:noFill/>
         </p:spPr>
         <p:txBody>
-          <a:bodyPr wrap="square" anchor="t" lIns="0" rIns="0" tIns="0" bIns="0">
+          <a:bodyPr wrap="square" lIns="0" tIns="0" rIns="0" bIns="0" anchor="t">
             <a:spAutoFit/>
           </a:bodyPr>
           <a:lstStyle/>
@@ -11061,6 +11328,7 @@
           <a:lstStyle/>
           <a:p>
             <a:pPr algn="ctr"/>
+            <a:endParaRPr/>
           </a:p>
         </p:txBody>
       </p:sp>
@@ -11081,7 +11349,7 @@
           <a:noFill/>
         </p:spPr>
         <p:txBody>
-          <a:bodyPr wrap="square" anchor="t" lIns="0" rIns="0" tIns="0" bIns="0">
+          <a:bodyPr wrap="square" lIns="0" tIns="0" rIns="0" bIns="0" anchor="t">
             <a:spAutoFit/>
           </a:bodyPr>
           <a:lstStyle/>
@@ -11116,7 +11384,7 @@
           <a:noFill/>
         </p:spPr>
         <p:txBody>
-          <a:bodyPr wrap="square" anchor="t" lIns="0" rIns="0" tIns="0" bIns="0">
+          <a:bodyPr wrap="square" lIns="0" tIns="0" rIns="0" bIns="0" anchor="t">
             <a:spAutoFit/>
           </a:bodyPr>
           <a:lstStyle/>
@@ -11175,6 +11443,7 @@
           <a:lstStyle/>
           <a:p>
             <a:pPr algn="ctr"/>
+            <a:endParaRPr/>
           </a:p>
         </p:txBody>
       </p:sp>
@@ -11195,7 +11464,7 @@
           <a:noFill/>
         </p:spPr>
         <p:txBody>
-          <a:bodyPr wrap="square" anchor="t" lIns="0" rIns="0" tIns="0" bIns="0">
+          <a:bodyPr wrap="square" lIns="0" tIns="0" rIns="0" bIns="0" anchor="t">
             <a:spAutoFit/>
           </a:bodyPr>
           <a:lstStyle/>
@@ -11230,7 +11499,7 @@
           <a:noFill/>
         </p:spPr>
         <p:txBody>
-          <a:bodyPr wrap="square" anchor="t" lIns="0" rIns="0" tIns="0" bIns="0">
+          <a:bodyPr wrap="square" lIns="0" tIns="0" rIns="0" bIns="0" anchor="t">
             <a:spAutoFit/>
           </a:bodyPr>
           <a:lstStyle/>
@@ -11335,7 +11604,7 @@
           <a:noFill/>
         </p:spPr>
         <p:txBody>
-          <a:bodyPr wrap="square" anchor="t" lIns="0" rIns="0" tIns="0" bIns="0">
+          <a:bodyPr wrap="square" lIns="0" tIns="0" rIns="0" bIns="0" anchor="t">
             <a:spAutoFit/>
           </a:bodyPr>
           <a:lstStyle/>
@@ -11394,6 +11663,7 @@
           <a:lstStyle/>
           <a:p>
             <a:pPr algn="ctr"/>
+            <a:endParaRPr/>
           </a:p>
         </p:txBody>
       </p:sp>
@@ -11414,7 +11684,7 @@
           <a:noFill/>
         </p:spPr>
         <p:txBody>
-          <a:bodyPr wrap="square" anchor="t" lIns="0" rIns="0" tIns="0" bIns="0">
+          <a:bodyPr wrap="square" lIns="0" tIns="0" rIns="0" bIns="0" anchor="t">
             <a:spAutoFit/>
           </a:bodyPr>
           <a:lstStyle/>
@@ -11449,7 +11719,7 @@
           <a:noFill/>
         </p:spPr>
         <p:txBody>
-          <a:bodyPr wrap="square" anchor="t" lIns="0" rIns="0" tIns="0" bIns="0">
+          <a:bodyPr wrap="square" lIns="0" tIns="0" rIns="0" bIns="0" anchor="t">
             <a:spAutoFit/>
           </a:bodyPr>
           <a:lstStyle/>
@@ -11508,6 +11778,7 @@
           <a:lstStyle/>
           <a:p>
             <a:pPr algn="ctr"/>
+            <a:endParaRPr/>
           </a:p>
         </p:txBody>
       </p:sp>
@@ -11528,7 +11799,7 @@
           <a:noFill/>
         </p:spPr>
         <p:txBody>
-          <a:bodyPr wrap="square" anchor="t" lIns="0" rIns="0" tIns="0" bIns="0">
+          <a:bodyPr wrap="square" lIns="0" tIns="0" rIns="0" bIns="0" anchor="t">
             <a:spAutoFit/>
           </a:bodyPr>
           <a:lstStyle/>
@@ -11563,7 +11834,7 @@
           <a:noFill/>
         </p:spPr>
         <p:txBody>
-          <a:bodyPr wrap="square" anchor="t" lIns="0" rIns="0" tIns="0" bIns="0">
+          <a:bodyPr wrap="square" lIns="0" tIns="0" rIns="0" bIns="0" anchor="t">
             <a:spAutoFit/>
           </a:bodyPr>
           <a:lstStyle/>
@@ -11622,6 +11893,7 @@
           <a:lstStyle/>
           <a:p>
             <a:pPr algn="ctr"/>
+            <a:endParaRPr/>
           </a:p>
         </p:txBody>
       </p:sp>
@@ -11642,7 +11914,7 @@
           <a:noFill/>
         </p:spPr>
         <p:txBody>
-          <a:bodyPr wrap="square" anchor="t" lIns="0" rIns="0" tIns="0" bIns="0">
+          <a:bodyPr wrap="square" lIns="0" tIns="0" rIns="0" bIns="0" anchor="t">
             <a:spAutoFit/>
           </a:bodyPr>
           <a:lstStyle/>
@@ -11677,7 +11949,7 @@
           <a:noFill/>
         </p:spPr>
         <p:txBody>
-          <a:bodyPr wrap="square" anchor="t" lIns="0" rIns="0" tIns="0" bIns="0">
+          <a:bodyPr wrap="square" lIns="0" tIns="0" rIns="0" bIns="0" anchor="t">
             <a:spAutoFit/>
           </a:bodyPr>
           <a:lstStyle/>
@@ -11736,6 +12008,7 @@
           <a:lstStyle/>
           <a:p>
             <a:pPr algn="ctr"/>
+            <a:endParaRPr/>
           </a:p>
         </p:txBody>
       </p:sp>
@@ -11756,7 +12029,7 @@
           <a:noFill/>
         </p:spPr>
         <p:txBody>
-          <a:bodyPr wrap="square" anchor="t" lIns="0" rIns="0" tIns="0" bIns="0">
+          <a:bodyPr wrap="square" lIns="0" tIns="0" rIns="0" bIns="0" anchor="t">
             <a:spAutoFit/>
           </a:bodyPr>
           <a:lstStyle/>
@@ -11791,7 +12064,7 @@
           <a:noFill/>
         </p:spPr>
         <p:txBody>
-          <a:bodyPr wrap="square" anchor="t" lIns="0" rIns="0" tIns="0" bIns="0">
+          <a:bodyPr wrap="square" lIns="0" tIns="0" rIns="0" bIns="0" anchor="t">
             <a:spAutoFit/>
           </a:bodyPr>
           <a:lstStyle/>
@@ -11850,6 +12123,7 @@
           <a:lstStyle/>
           <a:p>
             <a:pPr algn="ctr"/>
+            <a:endParaRPr/>
           </a:p>
         </p:txBody>
       </p:sp>
@@ -11870,7 +12144,7 @@
           <a:noFill/>
         </p:spPr>
         <p:txBody>
-          <a:bodyPr wrap="square" anchor="t" lIns="0" rIns="0" tIns="0" bIns="0">
+          <a:bodyPr wrap="square" lIns="0" tIns="0" rIns="0" bIns="0" anchor="t">
             <a:spAutoFit/>
           </a:bodyPr>
           <a:lstStyle/>
@@ -11905,7 +12179,7 @@
           <a:noFill/>
         </p:spPr>
         <p:txBody>
-          <a:bodyPr wrap="square" anchor="t" lIns="0" rIns="0" tIns="0" bIns="0">
+          <a:bodyPr wrap="square" lIns="0" tIns="0" rIns="0" bIns="0" anchor="t">
             <a:spAutoFit/>
           </a:bodyPr>
           <a:lstStyle/>
@@ -11964,6 +12238,7 @@
           <a:lstStyle/>
           <a:p>
             <a:pPr algn="ctr"/>
+            <a:endParaRPr/>
           </a:p>
         </p:txBody>
       </p:sp>
@@ -11984,7 +12259,7 @@
           <a:noFill/>
         </p:spPr>
         <p:txBody>
-          <a:bodyPr wrap="square" anchor="t" lIns="0" rIns="0" tIns="0" bIns="0">
+          <a:bodyPr wrap="square" lIns="0" tIns="0" rIns="0" bIns="0" anchor="t">
             <a:spAutoFit/>
           </a:bodyPr>
           <a:lstStyle/>
@@ -12019,7 +12294,7 @@
           <a:noFill/>
         </p:spPr>
         <p:txBody>
-          <a:bodyPr wrap="square" anchor="t" lIns="0" rIns="0" tIns="0" bIns="0">
+          <a:bodyPr wrap="square" lIns="0" tIns="0" rIns="0" bIns="0" anchor="t">
             <a:spAutoFit/>
           </a:bodyPr>
           <a:lstStyle/>
@@ -12054,7 +12329,7 @@
           <a:noFill/>
         </p:spPr>
         <p:txBody>
-          <a:bodyPr wrap="square" anchor="t" lIns="0" rIns="0" tIns="0" bIns="0">
+          <a:bodyPr wrap="square" lIns="0" tIns="0" rIns="0" bIns="0" anchor="t">
             <a:spAutoFit/>
           </a:bodyPr>
           <a:lstStyle/>
@@ -12089,7 +12364,7 @@
           <a:noFill/>
         </p:spPr>
         <p:txBody>
-          <a:bodyPr wrap="square" anchor="t" lIns="0" rIns="0" tIns="0" bIns="0">
+          <a:bodyPr wrap="square" lIns="0" tIns="0" rIns="0" bIns="0" anchor="t">
             <a:spAutoFit/>
           </a:bodyPr>
           <a:lstStyle/>
@@ -12116,7 +12391,7 @@
 </file>
 
 <file path=ppt/slides/slide8.xml><?xml version="1.0" encoding="utf-8"?>
-<p:sld xmlns:a="http://schemas.openxmlformats.org/drawingml/2006/main" xmlns:p="http://schemas.openxmlformats.org/presentationml/2006/main" xmlns:r="http://schemas.openxmlformats.org/officeDocument/2006/relationships">
+<p:sld xmlns:a="http://schemas.openxmlformats.org/drawingml/2006/main" xmlns:r="http://schemas.openxmlformats.org/officeDocument/2006/relationships" xmlns:p="http://schemas.openxmlformats.org/presentationml/2006/main">
   <p:cSld>
     <p:spTree>
       <p:nvGrpSpPr>
@@ -12124,7 +12399,14 @@
         <p:cNvGrpSpPr/>
         <p:nvPr/>
       </p:nvGrpSpPr>
-      <p:grpSpPr/>
+      <p:grpSpPr>
+        <a:xfrm>
+          <a:off x="0" y="0"/>
+          <a:ext cx="0" cy="0"/>
+          <a:chOff x="0" y="0"/>
+          <a:chExt cx="0" cy="0"/>
+        </a:xfrm>
+      </p:grpSpPr>
       <p:sp>
         <p:nvSpPr>
           <p:cNvPr id="2" name="Rectangle 1"/>
@@ -12166,6 +12448,7 @@
           <a:lstStyle/>
           <a:p>
             <a:pPr algn="ctr"/>
+            <a:endParaRPr/>
           </a:p>
         </p:txBody>
       </p:sp>
@@ -12186,7 +12469,7 @@
           <a:noFill/>
         </p:spPr>
         <p:txBody>
-          <a:bodyPr wrap="square" anchor="t" lIns="0" rIns="0" tIns="0" bIns="0">
+          <a:bodyPr wrap="square" lIns="0" tIns="0" rIns="0" bIns="0" anchor="t">
             <a:spAutoFit/>
           </a:bodyPr>
           <a:lstStyle/>
@@ -12221,7 +12504,7 @@
           <a:noFill/>
         </p:spPr>
         <p:txBody>
-          <a:bodyPr wrap="square" anchor="t" lIns="0" rIns="0" tIns="0" bIns="0">
+          <a:bodyPr wrap="square" lIns="0" tIns="0" rIns="0" bIns="0" anchor="t">
             <a:spAutoFit/>
           </a:bodyPr>
           <a:lstStyle/>
@@ -12280,6 +12563,7 @@
           <a:lstStyle/>
           <a:p>
             <a:pPr algn="ctr"/>
+            <a:endParaRPr/>
           </a:p>
         </p:txBody>
       </p:sp>
@@ -12324,6 +12608,7 @@
           <a:lstStyle/>
           <a:p>
             <a:pPr algn="ctr"/>
+            <a:endParaRPr/>
           </a:p>
         </p:txBody>
       </p:sp>
@@ -12368,6 +12653,7 @@
           <a:lstStyle/>
           <a:p>
             <a:pPr algn="ctr"/>
+            <a:endParaRPr/>
           </a:p>
         </p:txBody>
       </p:sp>
@@ -12388,7 +12674,7 @@
           <a:noFill/>
         </p:spPr>
         <p:txBody>
-          <a:bodyPr wrap="square" anchor="t" lIns="0" rIns="0" tIns="0" bIns="0">
+          <a:bodyPr wrap="square" lIns="0" tIns="0" rIns="0" bIns="0" anchor="t">
             <a:spAutoFit/>
           </a:bodyPr>
           <a:lstStyle/>
@@ -12423,7 +12709,7 @@
           <a:noFill/>
         </p:spPr>
         <p:txBody>
-          <a:bodyPr wrap="square" anchor="t" lIns="0" rIns="0" tIns="0" bIns="0">
+          <a:bodyPr wrap="square" lIns="0" tIns="0" rIns="0" bIns="0" anchor="t">
             <a:spAutoFit/>
           </a:bodyPr>
           <a:lstStyle/>
@@ -12482,6 +12768,7 @@
           <a:lstStyle/>
           <a:p>
             <a:pPr algn="ctr"/>
+            <a:endParaRPr/>
           </a:p>
         </p:txBody>
       </p:sp>
@@ -12526,6 +12813,7 @@
           <a:lstStyle/>
           <a:p>
             <a:pPr algn="ctr"/>
+            <a:endParaRPr/>
           </a:p>
         </p:txBody>
       </p:sp>
@@ -12546,7 +12834,7 @@
           <a:noFill/>
         </p:spPr>
         <p:txBody>
-          <a:bodyPr wrap="square" anchor="t" lIns="0" rIns="0" tIns="0" bIns="0">
+          <a:bodyPr wrap="square" lIns="0" tIns="0" rIns="0" bIns="0" anchor="t">
             <a:spAutoFit/>
           </a:bodyPr>
           <a:lstStyle/>
@@ -12581,7 +12869,7 @@
           <a:noFill/>
         </p:spPr>
         <p:txBody>
-          <a:bodyPr wrap="square" anchor="t" lIns="0" rIns="0" tIns="0" bIns="0">
+          <a:bodyPr wrap="square" lIns="0" tIns="0" rIns="0" bIns="0" anchor="t">
             <a:spAutoFit/>
           </a:bodyPr>
           <a:lstStyle/>
@@ -12640,6 +12928,7 @@
           <a:lstStyle/>
           <a:p>
             <a:pPr algn="ctr"/>
+            <a:endParaRPr/>
           </a:p>
         </p:txBody>
       </p:sp>
@@ -12684,6 +12973,7 @@
           <a:lstStyle/>
           <a:p>
             <a:pPr algn="ctr"/>
+            <a:endParaRPr/>
           </a:p>
         </p:txBody>
       </p:sp>
@@ -12704,7 +12994,7 @@
           <a:noFill/>
         </p:spPr>
         <p:txBody>
-          <a:bodyPr wrap="square" anchor="t" lIns="0" rIns="0" tIns="0" bIns="0">
+          <a:bodyPr wrap="square" lIns="0" tIns="0" rIns="0" bIns="0" anchor="t">
             <a:spAutoFit/>
           </a:bodyPr>
           <a:lstStyle/>
@@ -12739,7 +13029,7 @@
           <a:noFill/>
         </p:spPr>
         <p:txBody>
-          <a:bodyPr wrap="square" anchor="t" lIns="0" rIns="0" tIns="0" bIns="0">
+          <a:bodyPr wrap="square" lIns="0" tIns="0" rIns="0" bIns="0" anchor="t">
             <a:spAutoFit/>
           </a:bodyPr>
           <a:lstStyle/>
@@ -12798,6 +13088,7 @@
           <a:lstStyle/>
           <a:p>
             <a:pPr algn="ctr"/>
+            <a:endParaRPr/>
           </a:p>
         </p:txBody>
       </p:sp>
@@ -12842,6 +13133,7 @@
           <a:lstStyle/>
           <a:p>
             <a:pPr algn="ctr"/>
+            <a:endParaRPr/>
           </a:p>
         </p:txBody>
       </p:sp>
@@ -12862,7 +13154,7 @@
           <a:noFill/>
         </p:spPr>
         <p:txBody>
-          <a:bodyPr wrap="square" anchor="t" lIns="0" rIns="0" tIns="0" bIns="0">
+          <a:bodyPr wrap="square" lIns="0" tIns="0" rIns="0" bIns="0" anchor="t">
             <a:spAutoFit/>
           </a:bodyPr>
           <a:lstStyle/>
@@ -12897,7 +13189,7 @@
           <a:noFill/>
         </p:spPr>
         <p:txBody>
-          <a:bodyPr wrap="square" anchor="t" lIns="0" rIns="0" tIns="0" bIns="0">
+          <a:bodyPr wrap="square" lIns="0" tIns="0" rIns="0" bIns="0" anchor="t">
             <a:spAutoFit/>
           </a:bodyPr>
           <a:lstStyle/>
@@ -12932,7 +13224,7 @@
           <a:noFill/>
         </p:spPr>
         <p:txBody>
-          <a:bodyPr wrap="square" anchor="t" lIns="0" rIns="0" tIns="0" bIns="0">
+          <a:bodyPr wrap="square" lIns="0" tIns="0" rIns="0" bIns="0" anchor="t">
             <a:spAutoFit/>
           </a:bodyPr>
           <a:lstStyle/>
@@ -12967,7 +13259,7 @@
           <a:noFill/>
         </p:spPr>
         <p:txBody>
-          <a:bodyPr wrap="square" anchor="t" lIns="0" rIns="0" tIns="0" bIns="0">
+          <a:bodyPr wrap="square" lIns="0" tIns="0" rIns="0" bIns="0" anchor="t">
             <a:spAutoFit/>
           </a:bodyPr>
           <a:lstStyle/>
@@ -12994,7 +13286,7 @@
 </file>
 
 <file path=ppt/slides/slide9.xml><?xml version="1.0" encoding="utf-8"?>
-<p:sld xmlns:a="http://schemas.openxmlformats.org/drawingml/2006/main" xmlns:p="http://schemas.openxmlformats.org/presentationml/2006/main" xmlns:r="http://schemas.openxmlformats.org/officeDocument/2006/relationships">
+<p:sld xmlns:a="http://schemas.openxmlformats.org/drawingml/2006/main" xmlns:r="http://schemas.openxmlformats.org/officeDocument/2006/relationships" xmlns:p="http://schemas.openxmlformats.org/presentationml/2006/main">
   <p:cSld>
     <p:spTree>
       <p:nvGrpSpPr>
@@ -13002,7 +13294,14 @@
         <p:cNvGrpSpPr/>
         <p:nvPr/>
       </p:nvGrpSpPr>
-      <p:grpSpPr/>
+      <p:grpSpPr>
+        <a:xfrm>
+          <a:off x="0" y="0"/>
+          <a:ext cx="0" cy="0"/>
+          <a:chOff x="0" y="0"/>
+          <a:chExt cx="0" cy="0"/>
+        </a:xfrm>
+      </p:grpSpPr>
       <p:sp>
         <p:nvSpPr>
           <p:cNvPr id="2" name="Rectangle 1"/>
@@ -13044,6 +13343,7 @@
           <a:lstStyle/>
           <a:p>
             <a:pPr algn="ctr"/>
+            <a:endParaRPr/>
           </a:p>
         </p:txBody>
       </p:sp>
@@ -13064,7 +13364,7 @@
           <a:noFill/>
         </p:spPr>
         <p:txBody>
-          <a:bodyPr wrap="square" anchor="t" lIns="0" rIns="0" tIns="0" bIns="0">
+          <a:bodyPr wrap="square" lIns="0" tIns="0" rIns="0" bIns="0" anchor="t">
             <a:spAutoFit/>
           </a:bodyPr>
           <a:lstStyle/>
@@ -13099,7 +13399,7 @@
           <a:noFill/>
         </p:spPr>
         <p:txBody>
-          <a:bodyPr wrap="square" anchor="t" lIns="0" rIns="0" tIns="0" bIns="0">
+          <a:bodyPr wrap="square" lIns="0" tIns="0" rIns="0" bIns="0" anchor="t">
             <a:spAutoFit/>
           </a:bodyPr>
           <a:lstStyle/>
@@ -13158,6 +13458,7 @@
           <a:lstStyle/>
           <a:p>
             <a:pPr algn="ctr"/>
+            <a:endParaRPr/>
           </a:p>
         </p:txBody>
       </p:sp>
@@ -13204,6 +13505,7 @@
           <a:lstStyle/>
           <a:p>
             <a:pPr algn="ctr"/>
+            <a:endParaRPr/>
           </a:p>
         </p:txBody>
       </p:sp>
@@ -13248,6 +13550,7 @@
           <a:lstStyle/>
           <a:p>
             <a:pPr algn="ctr"/>
+            <a:endParaRPr/>
           </a:p>
         </p:txBody>
       </p:sp>
@@ -13268,7 +13571,7 @@
           <a:noFill/>
         </p:spPr>
         <p:txBody>
-          <a:bodyPr wrap="square" anchor="t" lIns="0" rIns="0" tIns="0" bIns="0">
+          <a:bodyPr wrap="square" lIns="0" tIns="0" rIns="0" bIns="0" anchor="t">
             <a:spAutoFit/>
           </a:bodyPr>
           <a:lstStyle/>
@@ -13303,7 +13606,7 @@
           <a:noFill/>
         </p:spPr>
         <p:txBody>
-          <a:bodyPr wrap="square" anchor="t" lIns="0" rIns="0" tIns="0" bIns="0">
+          <a:bodyPr wrap="square" lIns="0" tIns="0" rIns="0" bIns="0" anchor="t">
             <a:spAutoFit/>
           </a:bodyPr>
           <a:lstStyle/>
@@ -13462,6 +13765,7 @@
           <a:lstStyle/>
           <a:p>
             <a:pPr algn="ctr"/>
+            <a:endParaRPr/>
           </a:p>
         </p:txBody>
       </p:sp>
@@ -13506,6 +13810,7 @@
           <a:lstStyle/>
           <a:p>
             <a:pPr algn="ctr"/>
+            <a:endParaRPr/>
           </a:p>
         </p:txBody>
       </p:sp>
@@ -13526,7 +13831,7 @@
           <a:noFill/>
         </p:spPr>
         <p:txBody>
-          <a:bodyPr wrap="square" anchor="t" lIns="0" rIns="0" tIns="0" bIns="0">
+          <a:bodyPr wrap="square" lIns="0" tIns="0" rIns="0" bIns="0" anchor="t">
             <a:spAutoFit/>
           </a:bodyPr>
           <a:lstStyle/>
@@ -13561,7 +13866,7 @@
           <a:noFill/>
         </p:spPr>
         <p:txBody>
-          <a:bodyPr wrap="square" anchor="t" lIns="0" rIns="0" tIns="0" bIns="0">
+          <a:bodyPr wrap="square" lIns="0" tIns="0" rIns="0" bIns="0" anchor="t">
             <a:spAutoFit/>
           </a:bodyPr>
           <a:lstStyle/>
@@ -13720,6 +14025,7 @@
           <a:lstStyle/>
           <a:p>
             <a:pPr algn="ctr"/>
+            <a:endParaRPr/>
           </a:p>
         </p:txBody>
       </p:sp>
@@ -13764,6 +14070,7 @@
           <a:lstStyle/>
           <a:p>
             <a:pPr algn="ctr"/>
+            <a:endParaRPr/>
           </a:p>
         </p:txBody>
       </p:sp>
@@ -13784,7 +14091,7 @@
           <a:noFill/>
         </p:spPr>
         <p:txBody>
-          <a:bodyPr wrap="square" anchor="t" lIns="0" rIns="0" tIns="0" bIns="0">
+          <a:bodyPr wrap="square" lIns="0" tIns="0" rIns="0" bIns="0" anchor="t">
             <a:spAutoFit/>
           </a:bodyPr>
           <a:lstStyle/>
@@ -13819,7 +14126,7 @@
           <a:noFill/>
         </p:spPr>
         <p:txBody>
-          <a:bodyPr wrap="square" anchor="t" lIns="0" rIns="0" tIns="0" bIns="0">
+          <a:bodyPr wrap="square" lIns="0" tIns="0" rIns="0" bIns="0" anchor="t">
             <a:spAutoFit/>
           </a:bodyPr>
           <a:lstStyle/>
@@ -13952,7 +14259,7 @@
           <a:noFill/>
         </p:spPr>
         <p:txBody>
-          <a:bodyPr wrap="square" anchor="t" lIns="0" rIns="0" tIns="0" bIns="0">
+          <a:bodyPr wrap="square" lIns="0" tIns="0" rIns="0" bIns="0" anchor="t">
             <a:spAutoFit/>
           </a:bodyPr>
           <a:lstStyle/>
@@ -13987,7 +14294,7 @@
           <a:noFill/>
         </p:spPr>
         <p:txBody>
-          <a:bodyPr wrap="square" anchor="t" lIns="0" rIns="0" tIns="0" bIns="0">
+          <a:bodyPr wrap="square" lIns="0" tIns="0" rIns="0" bIns="0" anchor="t">
             <a:spAutoFit/>
           </a:bodyPr>
           <a:lstStyle/>
